--- a/Production_Financial_Plan_Presentation.pptx
+++ b/Production_Financial_Plan_Presentation.pptx
@@ -5,17 +5,16 @@
     <p:sldMasterId id="2147483648" r:id="rId1"/>
   </p:sldMasterIdLst>
   <p:sldIdLst>
-    <p:sldId id="256" r:id="rId2"/>
-    <p:sldId id="257" r:id="rId3"/>
-    <p:sldId id="258" r:id="rId4"/>
-    <p:sldId id="259" r:id="rId5"/>
-    <p:sldId id="260" r:id="rId6"/>
-    <p:sldId id="261" r:id="rId7"/>
-    <p:sldId id="262" r:id="rId8"/>
-    <p:sldId id="263" r:id="rId9"/>
-    <p:sldId id="264" r:id="rId10"/>
-    <p:sldId id="265" r:id="rId11"/>
-    <p:sldId id="266" r:id="rId12"/>
+    <p:sldId id="256" r:id="rId7"/>
+    <p:sldId id="257" r:id="rId8"/>
+    <p:sldId id="258" r:id="rId9"/>
+    <p:sldId id="259" r:id="rId10"/>
+    <p:sldId id="260" r:id="rId11"/>
+    <p:sldId id="261" r:id="rId12"/>
+    <p:sldId id="262" r:id="rId13"/>
+    <p:sldId id="263" r:id="rId14"/>
+    <p:sldId id="264" r:id="rId15"/>
+    <p:sldId id="265" r:id="rId16"/>
   </p:sldIdLst>
   <p:sldSz cx="9144000" cy="6858000" type="screen4x3"/>
   <p:notesSz cx="6858000" cy="9144000"/>
@@ -114,22 +113,6 @@
       </a:defRPr>
     </a:lvl9pPr>
   </p:defaultTextStyle>
-  <p:extLst>
-    <p:ext uri="{EFAFB233-063F-42B5-8137-9DF3F51BA10A}">
-      <p15:sldGuideLst xmlns:p15="http://schemas.microsoft.com/office/powerpoint/2012/main">
-        <p15:guide id="1" orient="horz" pos="2160">
-          <p15:clr>
-            <a:srgbClr val="A4A3A4"/>
-          </p15:clr>
-        </p15:guide>
-        <p15:guide id="2" pos="2880">
-          <p15:clr>
-            <a:srgbClr val="A4A3A4"/>
-          </p15:clr>
-        </p15:guide>
-      </p15:sldGuideLst>
-    </p:ext>
-  </p:extLst>
 </p:presentation>
 </file>
 
@@ -171,9 +154,10 @@
           <a:lstStyle/>
           <a:p>
             <a:r>
-              <a:rPr lang="en-US"/>
+              <a:rPr lang="en-US" smtClean="0"/>
               <a:t>Click to edit Master title style</a:t>
             </a:r>
+            <a:endParaRPr lang="en-US"/>
           </a:p>
         </p:txBody>
       </p:sp>
@@ -289,9 +273,10 @@
           </a:lstStyle>
           <a:p>
             <a:r>
-              <a:rPr lang="en-US"/>
+              <a:rPr lang="en-US" smtClean="0"/>
               <a:t>Click to edit Master subtitle style</a:t>
             </a:r>
+            <a:endParaRPr lang="en-US"/>
           </a:p>
         </p:txBody>
       </p:sp>
@@ -312,7 +297,7 @@
           <a:p>
             <a:fld id="{5BCAD085-E8A6-8845-BD4E-CB4CCA059FC4}" type="datetimeFigureOut">
               <a:rPr lang="en-US" smtClean="0"/>
-              <a:t>3/24/26</a:t>
+              <a:t>1/27/13</a:t>
             </a:fld>
             <a:endParaRPr lang="en-US"/>
           </a:p>
@@ -406,9 +391,10 @@
           <a:lstStyle/>
           <a:p>
             <a:r>
-              <a:rPr lang="en-US"/>
+              <a:rPr lang="en-US" smtClean="0"/>
               <a:t>Click to edit Master title style</a:t>
             </a:r>
+            <a:endParaRPr lang="en-US"/>
           </a:p>
         </p:txBody>
       </p:sp>
@@ -429,37 +415,38 @@
           <a:p>
             <a:pPr lvl="0"/>
             <a:r>
-              <a:rPr lang="en-US"/>
+              <a:rPr lang="en-US" smtClean="0"/>
               <a:t>Click to edit Master text styles</a:t>
             </a:r>
           </a:p>
           <a:p>
             <a:pPr lvl="1"/>
             <a:r>
-              <a:rPr lang="en-US"/>
+              <a:rPr lang="en-US" smtClean="0"/>
               <a:t>Second level</a:t>
             </a:r>
           </a:p>
           <a:p>
             <a:pPr lvl="2"/>
             <a:r>
-              <a:rPr lang="en-US"/>
+              <a:rPr lang="en-US" smtClean="0"/>
               <a:t>Third level</a:t>
             </a:r>
           </a:p>
           <a:p>
             <a:pPr lvl="3"/>
             <a:r>
-              <a:rPr lang="en-US"/>
+              <a:rPr lang="en-US" smtClean="0"/>
               <a:t>Fourth level</a:t>
             </a:r>
           </a:p>
           <a:p>
             <a:pPr lvl="4"/>
             <a:r>
-              <a:rPr lang="en-US"/>
+              <a:rPr lang="en-US" smtClean="0"/>
               <a:t>Fifth level</a:t>
             </a:r>
+            <a:endParaRPr lang="en-US"/>
           </a:p>
         </p:txBody>
       </p:sp>
@@ -480,7 +467,7 @@
           <a:p>
             <a:fld id="{5BCAD085-E8A6-8845-BD4E-CB4CCA059FC4}" type="datetimeFigureOut">
               <a:rPr lang="en-US" smtClean="0"/>
-              <a:t>3/24/26</a:t>
+              <a:t>1/27/13</a:t>
             </a:fld>
             <a:endParaRPr lang="en-US"/>
           </a:p>
@@ -579,9 +566,10 @@
           <a:lstStyle/>
           <a:p>
             <a:r>
-              <a:rPr lang="en-US"/>
+              <a:rPr lang="en-US" smtClean="0"/>
               <a:t>Click to edit Master title style</a:t>
             </a:r>
+            <a:endParaRPr lang="en-US"/>
           </a:p>
         </p:txBody>
       </p:sp>
@@ -607,37 +595,38 @@
           <a:p>
             <a:pPr lvl="0"/>
             <a:r>
-              <a:rPr lang="en-US"/>
+              <a:rPr lang="en-US" smtClean="0"/>
               <a:t>Click to edit Master text styles</a:t>
             </a:r>
           </a:p>
           <a:p>
             <a:pPr lvl="1"/>
             <a:r>
-              <a:rPr lang="en-US"/>
+              <a:rPr lang="en-US" smtClean="0"/>
               <a:t>Second level</a:t>
             </a:r>
           </a:p>
           <a:p>
             <a:pPr lvl="2"/>
             <a:r>
-              <a:rPr lang="en-US"/>
+              <a:rPr lang="en-US" smtClean="0"/>
               <a:t>Third level</a:t>
             </a:r>
           </a:p>
           <a:p>
             <a:pPr lvl="3"/>
             <a:r>
-              <a:rPr lang="en-US"/>
+              <a:rPr lang="en-US" smtClean="0"/>
               <a:t>Fourth level</a:t>
             </a:r>
           </a:p>
           <a:p>
             <a:pPr lvl="4"/>
             <a:r>
-              <a:rPr lang="en-US"/>
+              <a:rPr lang="en-US" smtClean="0"/>
               <a:t>Fifth level</a:t>
             </a:r>
+            <a:endParaRPr lang="en-US"/>
           </a:p>
         </p:txBody>
       </p:sp>
@@ -658,7 +647,7 @@
           <a:p>
             <a:fld id="{5BCAD085-E8A6-8845-BD4E-CB4CCA059FC4}" type="datetimeFigureOut">
               <a:rPr lang="en-US" smtClean="0"/>
-              <a:t>3/24/26</a:t>
+              <a:t>1/27/13</a:t>
             </a:fld>
             <a:endParaRPr lang="en-US"/>
           </a:p>
@@ -752,9 +741,10 @@
           <a:lstStyle/>
           <a:p>
             <a:r>
-              <a:rPr lang="en-US"/>
+              <a:rPr lang="en-US" smtClean="0"/>
               <a:t>Click to edit Master title style</a:t>
             </a:r>
+            <a:endParaRPr lang="en-US"/>
           </a:p>
         </p:txBody>
       </p:sp>
@@ -775,37 +765,38 @@
           <a:p>
             <a:pPr lvl="0"/>
             <a:r>
-              <a:rPr lang="en-US"/>
+              <a:rPr lang="en-US" smtClean="0"/>
               <a:t>Click to edit Master text styles</a:t>
             </a:r>
           </a:p>
           <a:p>
             <a:pPr lvl="1"/>
             <a:r>
-              <a:rPr lang="en-US"/>
+              <a:rPr lang="en-US" smtClean="0"/>
               <a:t>Second level</a:t>
             </a:r>
           </a:p>
           <a:p>
             <a:pPr lvl="2"/>
             <a:r>
-              <a:rPr lang="en-US"/>
+              <a:rPr lang="en-US" smtClean="0"/>
               <a:t>Third level</a:t>
             </a:r>
           </a:p>
           <a:p>
             <a:pPr lvl="3"/>
             <a:r>
-              <a:rPr lang="en-US"/>
+              <a:rPr lang="en-US" smtClean="0"/>
               <a:t>Fourth level</a:t>
             </a:r>
           </a:p>
           <a:p>
             <a:pPr lvl="4"/>
             <a:r>
-              <a:rPr lang="en-US"/>
+              <a:rPr lang="en-US" smtClean="0"/>
               <a:t>Fifth level</a:t>
             </a:r>
+            <a:endParaRPr lang="en-US"/>
           </a:p>
         </p:txBody>
       </p:sp>
@@ -826,7 +817,7 @@
           <a:p>
             <a:fld id="{5BCAD085-E8A6-8845-BD4E-CB4CCA059FC4}" type="datetimeFigureOut">
               <a:rPr lang="en-US" smtClean="0"/>
-              <a:t>3/24/26</a:t>
+              <a:t>1/27/13</a:t>
             </a:fld>
             <a:endParaRPr lang="en-US"/>
           </a:p>
@@ -929,9 +920,10 @@
           </a:lstStyle>
           <a:p>
             <a:r>
-              <a:rPr lang="en-US"/>
+              <a:rPr lang="en-US" smtClean="0"/>
               <a:t>Click to edit Master title style</a:t>
             </a:r>
+            <a:endParaRPr lang="en-US"/>
           </a:p>
         </p:txBody>
       </p:sp>
@@ -1048,7 +1040,7 @@
           <a:p>
             <a:pPr lvl="0"/>
             <a:r>
-              <a:rPr lang="en-US"/>
+              <a:rPr lang="en-US" smtClean="0"/>
               <a:t>Click to edit Master text styles</a:t>
             </a:r>
           </a:p>
@@ -1071,7 +1063,7 @@
           <a:p>
             <a:fld id="{5BCAD085-E8A6-8845-BD4E-CB4CCA059FC4}" type="datetimeFigureOut">
               <a:rPr lang="en-US" smtClean="0"/>
-              <a:t>3/24/26</a:t>
+              <a:t>1/27/13</a:t>
             </a:fld>
             <a:endParaRPr lang="en-US"/>
           </a:p>
@@ -1165,9 +1157,10 @@
           <a:lstStyle/>
           <a:p>
             <a:r>
-              <a:rPr lang="en-US"/>
+              <a:rPr lang="en-US" smtClean="0"/>
               <a:t>Click to edit Master title style</a:t>
             </a:r>
+            <a:endParaRPr lang="en-US"/>
           </a:p>
         </p:txBody>
       </p:sp>
@@ -1221,37 +1214,38 @@
           <a:p>
             <a:pPr lvl="0"/>
             <a:r>
-              <a:rPr lang="en-US"/>
+              <a:rPr lang="en-US" smtClean="0"/>
               <a:t>Click to edit Master text styles</a:t>
             </a:r>
           </a:p>
           <a:p>
             <a:pPr lvl="1"/>
             <a:r>
-              <a:rPr lang="en-US"/>
+              <a:rPr lang="en-US" smtClean="0"/>
               <a:t>Second level</a:t>
             </a:r>
           </a:p>
           <a:p>
             <a:pPr lvl="2"/>
             <a:r>
-              <a:rPr lang="en-US"/>
+              <a:rPr lang="en-US" smtClean="0"/>
               <a:t>Third level</a:t>
             </a:r>
           </a:p>
           <a:p>
             <a:pPr lvl="3"/>
             <a:r>
-              <a:rPr lang="en-US"/>
+              <a:rPr lang="en-US" smtClean="0"/>
               <a:t>Fourth level</a:t>
             </a:r>
           </a:p>
           <a:p>
             <a:pPr lvl="4"/>
             <a:r>
-              <a:rPr lang="en-US"/>
+              <a:rPr lang="en-US" smtClean="0"/>
               <a:t>Fifth level</a:t>
             </a:r>
+            <a:endParaRPr lang="en-US"/>
           </a:p>
         </p:txBody>
       </p:sp>
@@ -1305,37 +1299,38 @@
           <a:p>
             <a:pPr lvl="0"/>
             <a:r>
-              <a:rPr lang="en-US"/>
+              <a:rPr lang="en-US" smtClean="0"/>
               <a:t>Click to edit Master text styles</a:t>
             </a:r>
           </a:p>
           <a:p>
             <a:pPr lvl="1"/>
             <a:r>
-              <a:rPr lang="en-US"/>
+              <a:rPr lang="en-US" smtClean="0"/>
               <a:t>Second level</a:t>
             </a:r>
           </a:p>
           <a:p>
             <a:pPr lvl="2"/>
             <a:r>
-              <a:rPr lang="en-US"/>
+              <a:rPr lang="en-US" smtClean="0"/>
               <a:t>Third level</a:t>
             </a:r>
           </a:p>
           <a:p>
             <a:pPr lvl="3"/>
             <a:r>
-              <a:rPr lang="en-US"/>
+              <a:rPr lang="en-US" smtClean="0"/>
               <a:t>Fourth level</a:t>
             </a:r>
           </a:p>
           <a:p>
             <a:pPr lvl="4"/>
             <a:r>
-              <a:rPr lang="en-US"/>
+              <a:rPr lang="en-US" smtClean="0"/>
               <a:t>Fifth level</a:t>
             </a:r>
+            <a:endParaRPr lang="en-US"/>
           </a:p>
         </p:txBody>
       </p:sp>
@@ -1356,7 +1351,7 @@
           <a:p>
             <a:fld id="{5BCAD085-E8A6-8845-BD4E-CB4CCA059FC4}" type="datetimeFigureOut">
               <a:rPr lang="en-US" smtClean="0"/>
-              <a:t>3/24/26</a:t>
+              <a:t>1/27/13</a:t>
             </a:fld>
             <a:endParaRPr lang="en-US"/>
           </a:p>
@@ -1454,9 +1449,10 @@
           </a:lstStyle>
           <a:p>
             <a:r>
-              <a:rPr lang="en-US"/>
+              <a:rPr lang="en-US" smtClean="0"/>
               <a:t>Click to edit Master title style</a:t>
             </a:r>
+            <a:endParaRPr lang="en-US"/>
           </a:p>
         </p:txBody>
       </p:sp>
@@ -1519,7 +1515,7 @@
           <a:p>
             <a:pPr lvl="0"/>
             <a:r>
-              <a:rPr lang="en-US"/>
+              <a:rPr lang="en-US" smtClean="0"/>
               <a:t>Click to edit Master text styles</a:t>
             </a:r>
           </a:p>
@@ -1575,37 +1571,38 @@
           <a:p>
             <a:pPr lvl="0"/>
             <a:r>
-              <a:rPr lang="en-US"/>
+              <a:rPr lang="en-US" smtClean="0"/>
               <a:t>Click to edit Master text styles</a:t>
             </a:r>
           </a:p>
           <a:p>
             <a:pPr lvl="1"/>
             <a:r>
-              <a:rPr lang="en-US"/>
+              <a:rPr lang="en-US" smtClean="0"/>
               <a:t>Second level</a:t>
             </a:r>
           </a:p>
           <a:p>
             <a:pPr lvl="2"/>
             <a:r>
-              <a:rPr lang="en-US"/>
+              <a:rPr lang="en-US" smtClean="0"/>
               <a:t>Third level</a:t>
             </a:r>
           </a:p>
           <a:p>
             <a:pPr lvl="3"/>
             <a:r>
-              <a:rPr lang="en-US"/>
+              <a:rPr lang="en-US" smtClean="0"/>
               <a:t>Fourth level</a:t>
             </a:r>
           </a:p>
           <a:p>
             <a:pPr lvl="4"/>
             <a:r>
-              <a:rPr lang="en-US"/>
+              <a:rPr lang="en-US" smtClean="0"/>
               <a:t>Fifth level</a:t>
             </a:r>
+            <a:endParaRPr lang="en-US"/>
           </a:p>
         </p:txBody>
       </p:sp>
@@ -1668,7 +1665,7 @@
           <a:p>
             <a:pPr lvl="0"/>
             <a:r>
-              <a:rPr lang="en-US"/>
+              <a:rPr lang="en-US" smtClean="0"/>
               <a:t>Click to edit Master text styles</a:t>
             </a:r>
           </a:p>
@@ -1724,37 +1721,38 @@
           <a:p>
             <a:pPr lvl="0"/>
             <a:r>
-              <a:rPr lang="en-US"/>
+              <a:rPr lang="en-US" smtClean="0"/>
               <a:t>Click to edit Master text styles</a:t>
             </a:r>
           </a:p>
           <a:p>
             <a:pPr lvl="1"/>
             <a:r>
-              <a:rPr lang="en-US"/>
+              <a:rPr lang="en-US" smtClean="0"/>
               <a:t>Second level</a:t>
             </a:r>
           </a:p>
           <a:p>
             <a:pPr lvl="2"/>
             <a:r>
-              <a:rPr lang="en-US"/>
+              <a:rPr lang="en-US" smtClean="0"/>
               <a:t>Third level</a:t>
             </a:r>
           </a:p>
           <a:p>
             <a:pPr lvl="3"/>
             <a:r>
-              <a:rPr lang="en-US"/>
+              <a:rPr lang="en-US" smtClean="0"/>
               <a:t>Fourth level</a:t>
             </a:r>
           </a:p>
           <a:p>
             <a:pPr lvl="4"/>
             <a:r>
-              <a:rPr lang="en-US"/>
+              <a:rPr lang="en-US" smtClean="0"/>
               <a:t>Fifth level</a:t>
             </a:r>
+            <a:endParaRPr lang="en-US"/>
           </a:p>
         </p:txBody>
       </p:sp>
@@ -1775,7 +1773,7 @@
           <a:p>
             <a:fld id="{5BCAD085-E8A6-8845-BD4E-CB4CCA059FC4}" type="datetimeFigureOut">
               <a:rPr lang="en-US" smtClean="0"/>
-              <a:t>3/24/26</a:t>
+              <a:t>1/27/13</a:t>
             </a:fld>
             <a:endParaRPr lang="en-US"/>
           </a:p>
@@ -1869,9 +1867,10 @@
           <a:lstStyle/>
           <a:p>
             <a:r>
-              <a:rPr lang="en-US"/>
+              <a:rPr lang="en-US" smtClean="0"/>
               <a:t>Click to edit Master title style</a:t>
             </a:r>
+            <a:endParaRPr lang="en-US"/>
           </a:p>
         </p:txBody>
       </p:sp>
@@ -1892,7 +1891,7 @@
           <a:p>
             <a:fld id="{5BCAD085-E8A6-8845-BD4E-CB4CCA059FC4}" type="datetimeFigureOut">
               <a:rPr lang="en-US" smtClean="0"/>
-              <a:t>3/24/26</a:t>
+              <a:t>1/27/13</a:t>
             </a:fld>
             <a:endParaRPr lang="en-US"/>
           </a:p>
@@ -1987,7 +1986,7 @@
           <a:p>
             <a:fld id="{5BCAD085-E8A6-8845-BD4E-CB4CCA059FC4}" type="datetimeFigureOut">
               <a:rPr lang="en-US" smtClean="0"/>
-              <a:t>3/24/26</a:t>
+              <a:t>1/27/13</a:t>
             </a:fld>
             <a:endParaRPr lang="en-US"/>
           </a:p>
@@ -2090,9 +2089,10 @@
           </a:lstStyle>
           <a:p>
             <a:r>
-              <a:rPr lang="en-US"/>
+              <a:rPr lang="en-US" smtClean="0"/>
               <a:t>Click to edit Master title style</a:t>
             </a:r>
+            <a:endParaRPr lang="en-US"/>
           </a:p>
         </p:txBody>
       </p:sp>
@@ -2146,37 +2146,38 @@
           <a:p>
             <a:pPr lvl="0"/>
             <a:r>
-              <a:rPr lang="en-US"/>
+              <a:rPr lang="en-US" smtClean="0"/>
               <a:t>Click to edit Master text styles</a:t>
             </a:r>
           </a:p>
           <a:p>
             <a:pPr lvl="1"/>
             <a:r>
-              <a:rPr lang="en-US"/>
+              <a:rPr lang="en-US" smtClean="0"/>
               <a:t>Second level</a:t>
             </a:r>
           </a:p>
           <a:p>
             <a:pPr lvl="2"/>
             <a:r>
-              <a:rPr lang="en-US"/>
+              <a:rPr lang="en-US" smtClean="0"/>
               <a:t>Third level</a:t>
             </a:r>
           </a:p>
           <a:p>
             <a:pPr lvl="3"/>
             <a:r>
-              <a:rPr lang="en-US"/>
+              <a:rPr lang="en-US" smtClean="0"/>
               <a:t>Fourth level</a:t>
             </a:r>
           </a:p>
           <a:p>
             <a:pPr lvl="4"/>
             <a:r>
-              <a:rPr lang="en-US"/>
+              <a:rPr lang="en-US" smtClean="0"/>
               <a:t>Fifth level</a:t>
             </a:r>
+            <a:endParaRPr lang="en-US"/>
           </a:p>
         </p:txBody>
       </p:sp>
@@ -2239,7 +2240,7 @@
           <a:p>
             <a:pPr lvl="0"/>
             <a:r>
-              <a:rPr lang="en-US"/>
+              <a:rPr lang="en-US" smtClean="0"/>
               <a:t>Click to edit Master text styles</a:t>
             </a:r>
           </a:p>
@@ -2262,7 +2263,7 @@
           <a:p>
             <a:fld id="{5BCAD085-E8A6-8845-BD4E-CB4CCA059FC4}" type="datetimeFigureOut">
               <a:rPr lang="en-US" smtClean="0"/>
-              <a:t>3/24/26</a:t>
+              <a:t>1/27/13</a:t>
             </a:fld>
             <a:endParaRPr lang="en-US"/>
           </a:p>
@@ -2365,9 +2366,10 @@
           </a:lstStyle>
           <a:p>
             <a:r>
-              <a:rPr lang="en-US"/>
+              <a:rPr lang="en-US" smtClean="0"/>
               <a:t>Click to edit Master title style</a:t>
             </a:r>
+            <a:endParaRPr lang="en-US"/>
           </a:p>
         </p:txBody>
       </p:sp>
@@ -2491,7 +2493,7 @@
           <a:p>
             <a:pPr lvl="0"/>
             <a:r>
-              <a:rPr lang="en-US"/>
+              <a:rPr lang="en-US" smtClean="0"/>
               <a:t>Click to edit Master text styles</a:t>
             </a:r>
           </a:p>
@@ -2514,7 +2516,7 @@
           <a:p>
             <a:fld id="{5BCAD085-E8A6-8845-BD4E-CB4CCA059FC4}" type="datetimeFigureOut">
               <a:rPr lang="en-US" smtClean="0"/>
-              <a:t>3/24/26</a:t>
+              <a:t>1/27/13</a:t>
             </a:fld>
             <a:endParaRPr lang="en-US"/>
           </a:p>
@@ -2623,9 +2625,10 @@
           <a:lstStyle/>
           <a:p>
             <a:r>
-              <a:rPr lang="en-US"/>
+              <a:rPr lang="en-US" smtClean="0"/>
               <a:t>Click to edit Master title style</a:t>
             </a:r>
+            <a:endParaRPr lang="en-US"/>
           </a:p>
         </p:txBody>
       </p:sp>
@@ -2656,37 +2659,38 @@
           <a:p>
             <a:pPr lvl="0"/>
             <a:r>
-              <a:rPr lang="en-US"/>
+              <a:rPr lang="en-US" smtClean="0"/>
               <a:t>Click to edit Master text styles</a:t>
             </a:r>
           </a:p>
           <a:p>
             <a:pPr lvl="1"/>
             <a:r>
-              <a:rPr lang="en-US"/>
+              <a:rPr lang="en-US" smtClean="0"/>
               <a:t>Second level</a:t>
             </a:r>
           </a:p>
           <a:p>
             <a:pPr lvl="2"/>
             <a:r>
-              <a:rPr lang="en-US"/>
+              <a:rPr lang="en-US" smtClean="0"/>
               <a:t>Third level</a:t>
             </a:r>
           </a:p>
           <a:p>
             <a:pPr lvl="3"/>
             <a:r>
-              <a:rPr lang="en-US"/>
+              <a:rPr lang="en-US" smtClean="0"/>
               <a:t>Fourth level</a:t>
             </a:r>
           </a:p>
           <a:p>
             <a:pPr lvl="4"/>
             <a:r>
-              <a:rPr lang="en-US"/>
+              <a:rPr lang="en-US" smtClean="0"/>
               <a:t>Fifth level</a:t>
             </a:r>
+            <a:endParaRPr lang="en-US"/>
           </a:p>
         </p:txBody>
       </p:sp>
@@ -2725,7 +2729,7 @@
           <a:p>
             <a:fld id="{5BCAD085-E8A6-8845-BD4E-CB4CCA059FC4}" type="datetimeFigureOut">
               <a:rPr lang="en-US" smtClean="0"/>
-              <a:t>3/24/26</a:t>
+              <a:t>1/27/13</a:t>
             </a:fld>
             <a:endParaRPr lang="en-US"/>
           </a:p>
@@ -3084,7 +3088,7 @@
 </file>
 
 <file path=ppt/slides/slide1.xml><?xml version="1.0" encoding="utf-8"?>
-<p:sld xmlns:a="http://schemas.openxmlformats.org/drawingml/2006/main" xmlns:r="http://schemas.openxmlformats.org/officeDocument/2006/relationships" xmlns:p="http://schemas.openxmlformats.org/presentationml/2006/main">
+<p:sld xmlns:a="http://schemas.openxmlformats.org/drawingml/2006/main" xmlns:p="http://schemas.openxmlformats.org/presentationml/2006/main" xmlns:r="http://schemas.openxmlformats.org/officeDocument/2006/relationships">
   <p:cSld>
     <p:spTree>
       <p:nvGrpSpPr>
@@ -3092,14 +3096,7 @@
         <p:cNvGrpSpPr/>
         <p:nvPr/>
       </p:nvGrpSpPr>
-      <p:grpSpPr>
-        <a:xfrm>
-          <a:off x="0" y="0"/>
-          <a:ext cx="0" cy="0"/>
-          <a:chOff x="0" y="0"/>
-          <a:chExt cx="0" cy="0"/>
-        </a:xfrm>
-      </p:grpSpPr>
+      <p:grpSpPr/>
       <p:sp>
         <p:nvSpPr>
           <p:cNvPr id="2" name="Title 1"/>
@@ -3156,7 +3153,7 @@
 </file>
 
 <file path=ppt/slides/slide10.xml><?xml version="1.0" encoding="utf-8"?>
-<p:sld xmlns:a="http://schemas.openxmlformats.org/drawingml/2006/main" xmlns:r="http://schemas.openxmlformats.org/officeDocument/2006/relationships" xmlns:p="http://schemas.openxmlformats.org/presentationml/2006/main">
+<p:sld xmlns:a="http://schemas.openxmlformats.org/drawingml/2006/main" xmlns:p="http://schemas.openxmlformats.org/presentationml/2006/main" xmlns:r="http://schemas.openxmlformats.org/officeDocument/2006/relationships">
   <p:cSld>
     <p:spTree>
       <p:nvGrpSpPr>
@@ -3164,14 +3161,7 @@
         <p:cNvGrpSpPr/>
         <p:nvPr/>
       </p:nvGrpSpPr>
-      <p:grpSpPr>
-        <a:xfrm>
-          <a:off x="0" y="0"/>
-          <a:ext cx="0" cy="0"/>
-          <a:chOff x="0" y="0"/>
-          <a:chExt cx="0" cy="0"/>
-        </a:xfrm>
-      </p:grpSpPr>
+      <p:grpSpPr/>
       <p:sp>
         <p:nvSpPr>
           <p:cNvPr id="2" name="Title 1"/>
@@ -3182,18 +3172,12 @@
             <p:ph type="title"/>
           </p:nvPr>
         </p:nvSpPr>
-        <p:spPr>
-          <a:xfrm>
-            <a:off x="0" y="97971"/>
-            <a:ext cx="8686800" cy="1143000"/>
-          </a:xfrm>
-        </p:spPr>
+        <p:spPr/>
         <p:txBody>
           <a:bodyPr/>
           <a:lstStyle/>
           <a:p>
             <a:r>
-              <a:rPr dirty="0"/>
               <a:t>Financial Performance Visualizations</a:t>
             </a:r>
           </a:p>
@@ -3215,8 +3199,32 @@
         </p:blipFill>
         <p:spPr>
           <a:xfrm>
-            <a:off x="0" y="991589"/>
-            <a:ext cx="9094518" cy="5456711"/>
+            <a:off x="457200" y="1371600"/>
+            <a:ext cx="5334000" cy="3200400"/>
+          </a:xfrm>
+          <a:prstGeom prst="rect">
+            <a:avLst/>
+          </a:prstGeom>
+        </p:spPr>
+      </p:pic>
+      <p:pic>
+        <p:nvPicPr>
+          <p:cNvPr id="4" name="Picture 3" descr="breakeven_chart.png"/>
+          <p:cNvPicPr>
+            <a:picLocks noChangeAspect="1"/>
+          </p:cNvPicPr>
+          <p:nvPr/>
+        </p:nvPicPr>
+        <p:blipFill>
+          <a:blip r:embed="rId3"/>
+          <a:stretch>
+            <a:fillRect/>
+          </a:stretch>
+        </p:blipFill>
+        <p:spPr>
+          <a:xfrm>
+            <a:off x="4572000" y="1371600"/>
+            <a:ext cx="5334000" cy="3200400"/>
           </a:xfrm>
           <a:prstGeom prst="rect">
             <a:avLst/>
@@ -3231,107 +3239,8 @@
 </p:sld>
 </file>
 
-<file path=ppt/slides/slide11.xml><?xml version="1.0" encoding="utf-8"?>
-<p:sld xmlns:a="http://schemas.openxmlformats.org/drawingml/2006/main" xmlns:r="http://schemas.openxmlformats.org/officeDocument/2006/relationships" xmlns:p="http://schemas.openxmlformats.org/presentationml/2006/main">
-  <p:cSld>
-    <p:spTree>
-      <p:nvGrpSpPr>
-        <p:cNvPr id="1" name="">
-          <a:extLst>
-            <a:ext uri="{FF2B5EF4-FFF2-40B4-BE49-F238E27FC236}">
-              <a16:creationId xmlns:a16="http://schemas.microsoft.com/office/drawing/2014/main" id="{D1A7C378-AAD2-A7E5-31B6-02D2BF05B829}"/>
-            </a:ext>
-          </a:extLst>
-        </p:cNvPr>
-        <p:cNvGrpSpPr/>
-        <p:nvPr/>
-      </p:nvGrpSpPr>
-      <p:grpSpPr>
-        <a:xfrm>
-          <a:off x="0" y="0"/>
-          <a:ext cx="0" cy="0"/>
-          <a:chOff x="0" y="0"/>
-          <a:chExt cx="0" cy="0"/>
-        </a:xfrm>
-      </p:grpSpPr>
-      <p:sp>
-        <p:nvSpPr>
-          <p:cNvPr id="2" name="Title 1">
-            <a:extLst>
-              <a:ext uri="{FF2B5EF4-FFF2-40B4-BE49-F238E27FC236}">
-                <a16:creationId xmlns:a16="http://schemas.microsoft.com/office/drawing/2014/main" id="{5F858DE1-0A52-F9E7-5C06-93026B4D99CA}"/>
-              </a:ext>
-            </a:extLst>
-          </p:cNvPr>
-          <p:cNvSpPr>
-            <a:spLocks noGrp="1"/>
-          </p:cNvSpPr>
-          <p:nvPr>
-            <p:ph type="title"/>
-          </p:nvPr>
-        </p:nvSpPr>
-        <p:spPr>
-          <a:xfrm>
-            <a:off x="0" y="97971"/>
-            <a:ext cx="8686800" cy="1143000"/>
-          </a:xfrm>
-        </p:spPr>
-        <p:txBody>
-          <a:bodyPr/>
-          <a:lstStyle/>
-          <a:p>
-            <a:r>
-              <a:rPr dirty="0"/>
-              <a:t>Financial Performance Visualizations</a:t>
-            </a:r>
-          </a:p>
-        </p:txBody>
-      </p:sp>
-      <p:pic>
-        <p:nvPicPr>
-          <p:cNvPr id="4" name="Picture 3" descr="breakeven_chart.png">
-            <a:extLst>
-              <a:ext uri="{FF2B5EF4-FFF2-40B4-BE49-F238E27FC236}">
-                <a16:creationId xmlns:a16="http://schemas.microsoft.com/office/drawing/2014/main" id="{742972EB-131D-48F4-3847-B590F15ECD9F}"/>
-              </a:ext>
-            </a:extLst>
-          </p:cNvPr>
-          <p:cNvPicPr>
-            <a:picLocks noChangeAspect="1"/>
-          </p:cNvPicPr>
-          <p:nvPr/>
-        </p:nvPicPr>
-        <p:blipFill>
-          <a:blip r:embed="rId2"/>
-          <a:stretch>
-            <a:fillRect/>
-          </a:stretch>
-        </p:blipFill>
-        <p:spPr>
-          <a:xfrm>
-            <a:off x="83127" y="1144780"/>
-            <a:ext cx="8977745" cy="5386647"/>
-          </a:xfrm>
-          <a:prstGeom prst="rect">
-            <a:avLst/>
-          </a:prstGeom>
-        </p:spPr>
-      </p:pic>
-    </p:spTree>
-    <p:extLst>
-      <p:ext uri="{BB962C8B-B14F-4D97-AF65-F5344CB8AC3E}">
-        <p14:creationId xmlns:p14="http://schemas.microsoft.com/office/powerpoint/2010/main" val="3924529059"/>
-      </p:ext>
-    </p:extLst>
-  </p:cSld>
-  <p:clrMapOvr>
-    <a:masterClrMapping/>
-  </p:clrMapOvr>
-</p:sld>
-</file>
-
 <file path=ppt/slides/slide2.xml><?xml version="1.0" encoding="utf-8"?>
-<p:sld xmlns:a="http://schemas.openxmlformats.org/drawingml/2006/main" xmlns:r="http://schemas.openxmlformats.org/officeDocument/2006/relationships" xmlns:p="http://schemas.openxmlformats.org/presentationml/2006/main">
+<p:sld xmlns:a="http://schemas.openxmlformats.org/drawingml/2006/main" xmlns:p="http://schemas.openxmlformats.org/presentationml/2006/main" xmlns:r="http://schemas.openxmlformats.org/officeDocument/2006/relationships">
   <p:cSld>
     <p:spTree>
       <p:nvGrpSpPr>
@@ -3339,14 +3248,7 @@
         <p:cNvGrpSpPr/>
         <p:nvPr/>
       </p:nvGrpSpPr>
-      <p:grpSpPr>
-        <a:xfrm>
-          <a:off x="0" y="0"/>
-          <a:ext cx="0" cy="0"/>
-          <a:chOff x="0" y="0"/>
-          <a:chExt cx="0" cy="0"/>
-        </a:xfrm>
-      </p:grpSpPr>
+      <p:grpSpPr/>
       <p:sp>
         <p:nvSpPr>
           <p:cNvPr id="2" name="Title 1"/>
@@ -3359,9 +3261,7 @@
         </p:nvSpPr>
         <p:spPr/>
         <p:txBody>
-          <a:bodyPr>
-            <a:normAutofit fontScale="90000"/>
-          </a:bodyPr>
+          <a:bodyPr/>
           <a:lstStyle/>
           <a:p>
             <a:r>
@@ -3376,17 +3276,11 @@
           <p:cNvGraphicFramePr>
             <a:graphicFrameLocks noGrp="1"/>
           </p:cNvGraphicFramePr>
-          <p:nvPr>
-            <p:extLst>
-              <p:ext uri="{D42A27DB-BD31-4B8C-83A1-F6EECF244321}">
-                <p14:modId xmlns:p14="http://schemas.microsoft.com/office/powerpoint/2010/main" val="2377898173"/>
-              </p:ext>
-            </p:extLst>
-          </p:nvPr>
+          <p:nvPr/>
         </p:nvGraphicFramePr>
         <p:xfrm>
-          <a:off x="169224" y="1888176"/>
-          <a:ext cx="8805552" cy="3817915"/>
+          <a:off x="457200" y="1371600"/>
+          <a:ext cx="8229600" cy="2743200"/>
         </p:xfrm>
         <a:graphic>
           <a:graphicData uri="http://schemas.openxmlformats.org/drawingml/2006/table">
@@ -3395,29 +3289,11 @@
                 <a:tableStyleId>{5C22544A-7EE6-4342-B048-85BDC9FD1C3A}</a:tableStyleId>
               </a:tblPr>
               <a:tblGrid>
-                <a:gridCol w="2935184">
-                  <a:extLst>
-                    <a:ext uri="{9D8B030D-6E8A-4147-A177-3AD203B41FA5}">
-                      <a16:colId xmlns:a16="http://schemas.microsoft.com/office/drawing/2014/main" val="20000"/>
-                    </a:ext>
-                  </a:extLst>
-                </a:gridCol>
-                <a:gridCol w="2935184">
-                  <a:extLst>
-                    <a:ext uri="{9D8B030D-6E8A-4147-A177-3AD203B41FA5}">
-                      <a16:colId xmlns:a16="http://schemas.microsoft.com/office/drawing/2014/main" val="20001"/>
-                    </a:ext>
-                  </a:extLst>
-                </a:gridCol>
-                <a:gridCol w="2935184">
-                  <a:extLst>
-                    <a:ext uri="{9D8B030D-6E8A-4147-A177-3AD203B41FA5}">
-                      <a16:colId xmlns:a16="http://schemas.microsoft.com/office/drawing/2014/main" val="20002"/>
-                    </a:ext>
-                  </a:extLst>
-                </a:gridCol>
+                <a:gridCol w="2743200"/>
+                <a:gridCol w="2743200"/>
+                <a:gridCol w="2743200"/>
               </a:tblGrid>
-              <a:tr h="763583">
+              <a:tr h="548640">
                 <a:tc>
                   <a:txBody>
                     <a:bodyPr/>
@@ -3431,7 +3307,6 @@
                         </a:defRPr>
                       </a:pPr>
                       <a:r>
-                        <a:rPr sz="2000"/>
                         <a:t>Metric</a:t>
                       </a:r>
                     </a:p>
@@ -3455,7 +3330,6 @@
                         </a:defRPr>
                       </a:pPr>
                       <a:r>
-                        <a:rPr sz="2000"/>
                         <a:t>Baseline (Outsource)</a:t>
                       </a:r>
                     </a:p>
@@ -3479,7 +3353,6 @@
                         </a:defRPr>
                       </a:pPr>
                       <a:r>
-                        <a:rPr sz="2000"/>
                         <a:t>With-Project (Local)</a:t>
                       </a:r>
                     </a:p>
@@ -3490,23 +3363,17 @@
                     </a:solidFill>
                   </a:tcPr>
                 </a:tc>
-                <a:extLst>
-                  <a:ext uri="{0D108BD9-81ED-4DB2-BD59-A6C34878D82A}">
-                    <a16:rowId xmlns:a16="http://schemas.microsoft.com/office/drawing/2014/main" val="10000"/>
-                  </a:ext>
-                </a:extLst>
               </a:tr>
-              <a:tr h="763583">
-                <a:tc>
-                  <a:txBody>
-                    <a:bodyPr/>
-                    <a:lstStyle/>
-                    <a:p>
-                      <a:pPr algn="ctr">
-                        <a:defRPr sz="900" b="0"/>
-                      </a:pPr>
-                      <a:r>
-                        <a:rPr sz="2000" dirty="0"/>
+              <a:tr h="548640">
+                <a:tc>
+                  <a:txBody>
+                    <a:bodyPr/>
+                    <a:lstStyle/>
+                    <a:p>
+                      <a:pPr algn="ctr">
+                        <a:defRPr sz="900" b="0"/>
+                      </a:pPr>
+                      <a:r>
                         <a:t>Supply Chain Risk</a:t>
                       </a:r>
                     </a:p>
@@ -3526,7 +3393,6 @@
                         <a:defRPr sz="900" b="0"/>
                       </a:pPr>
                       <a:r>
-                        <a:rPr sz="2000"/>
                         <a:t>High (Long lead times)</a:t>
                       </a:r>
                     </a:p>
@@ -3546,7 +3412,6 @@
                         <a:defRPr sz="900" b="0"/>
                       </a:pPr>
                       <a:r>
-                        <a:rPr sz="2000"/>
                         <a:t>Low (Local control)</a:t>
                       </a:r>
                     </a:p>
@@ -3557,23 +3422,17 @@
                     </a:solidFill>
                   </a:tcPr>
                 </a:tc>
-                <a:extLst>
-                  <a:ext uri="{0D108BD9-81ED-4DB2-BD59-A6C34878D82A}">
-                    <a16:rowId xmlns:a16="http://schemas.microsoft.com/office/drawing/2014/main" val="10001"/>
-                  </a:ext>
-                </a:extLst>
               </a:tr>
-              <a:tr h="763583">
-                <a:tc>
-                  <a:txBody>
-                    <a:bodyPr/>
-                    <a:lstStyle/>
-                    <a:p>
-                      <a:pPr algn="ctr">
-                        <a:defRPr sz="900" b="0"/>
-                      </a:pPr>
-                      <a:r>
-                        <a:rPr sz="2000"/>
+              <a:tr h="548640">
+                <a:tc>
+                  <a:txBody>
+                    <a:bodyPr/>
+                    <a:lstStyle/>
+                    <a:p>
+                      <a:pPr algn="ctr">
+                        <a:defRPr sz="900" b="0"/>
+                      </a:pPr>
+                      <a:r>
                         <a:t>Production Cost</a:t>
                       </a:r>
                     </a:p>
@@ -3593,7 +3452,6 @@
                         <a:defRPr sz="900" b="0"/>
                       </a:pPr>
                       <a:r>
-                        <a:rPr sz="2000"/>
                         <a:t>Market Price + Margin</a:t>
                       </a:r>
                     </a:p>
@@ -3613,7 +3471,6 @@
                         <a:defRPr sz="900" b="0"/>
                       </a:pPr>
                       <a:r>
-                        <a:rPr sz="2000"/>
                         <a:t>Internal Variable Cost</a:t>
                       </a:r>
                     </a:p>
@@ -3624,23 +3481,17 @@
                     </a:solidFill>
                   </a:tcPr>
                 </a:tc>
-                <a:extLst>
-                  <a:ext uri="{0D108BD9-81ED-4DB2-BD59-A6C34878D82A}">
-                    <a16:rowId xmlns:a16="http://schemas.microsoft.com/office/drawing/2014/main" val="10002"/>
-                  </a:ext>
-                </a:extLst>
               </a:tr>
-              <a:tr h="763583">
-                <a:tc>
-                  <a:txBody>
-                    <a:bodyPr/>
-                    <a:lstStyle/>
-                    <a:p>
-                      <a:pPr algn="ctr">
-                        <a:defRPr sz="900" b="0"/>
-                      </a:pPr>
-                      <a:r>
-                        <a:rPr sz="2000"/>
+              <a:tr h="548640">
+                <a:tc>
+                  <a:txBody>
+                    <a:bodyPr/>
+                    <a:lstStyle/>
+                    <a:p>
+                      <a:pPr algn="ctr">
+                        <a:defRPr sz="900" b="0"/>
+                      </a:pPr>
+                      <a:r>
                         <a:t>Strategic Value</a:t>
                       </a:r>
                     </a:p>
@@ -3660,7 +3511,6 @@
                         <a:defRPr sz="900" b="0"/>
                       </a:pPr>
                       <a:r>
-                        <a:rPr sz="2000"/>
                         <a:t>Dependency on Imports</a:t>
                       </a:r>
                     </a:p>
@@ -3680,7 +3530,6 @@
                         <a:defRPr sz="900" b="0"/>
                       </a:pPr>
                       <a:r>
-                        <a:rPr sz="2000"/>
                         <a:t>EU "Made in EU" Premium</a:t>
                       </a:r>
                     </a:p>
@@ -3691,23 +3540,17 @@
                     </a:solidFill>
                   </a:tcPr>
                 </a:tc>
-                <a:extLst>
-                  <a:ext uri="{0D108BD9-81ED-4DB2-BD59-A6C34878D82A}">
-                    <a16:rowId xmlns:a16="http://schemas.microsoft.com/office/drawing/2014/main" val="10003"/>
-                  </a:ext>
-                </a:extLst>
               </a:tr>
-              <a:tr h="763583">
-                <a:tc>
-                  <a:txBody>
-                    <a:bodyPr/>
-                    <a:lstStyle/>
-                    <a:p>
-                      <a:pPr algn="ctr">
-                        <a:defRPr sz="900" b="0"/>
-                      </a:pPr>
-                      <a:r>
-                        <a:rPr sz="2000"/>
+              <a:tr h="548640">
+                <a:tc>
+                  <a:txBody>
+                    <a:bodyPr/>
+                    <a:lstStyle/>
+                    <a:p>
+                      <a:pPr algn="ctr">
+                        <a:defRPr sz="900" b="0"/>
+                      </a:pPr>
+                      <a:r>
                         <a:t>CIT Rate</a:t>
                       </a:r>
                     </a:p>
@@ -3727,7 +3570,6 @@
                         <a:defRPr sz="900" b="0"/>
                       </a:pPr>
                       <a:r>
-                        <a:rPr sz="2000"/>
                         <a:t>15%</a:t>
                       </a:r>
                     </a:p>
@@ -3747,7 +3589,6 @@
                         <a:defRPr sz="900" b="0"/>
                       </a:pPr>
                       <a:r>
-                        <a:rPr sz="2000" dirty="0"/>
                         <a:t>0% (Klaipeda FEZ)</a:t>
                       </a:r>
                     </a:p>
@@ -3758,11 +3599,6 @@
                     </a:solidFill>
                   </a:tcPr>
                 </a:tc>
-                <a:extLst>
-                  <a:ext uri="{0D108BD9-81ED-4DB2-BD59-A6C34878D82A}">
-                    <a16:rowId xmlns:a16="http://schemas.microsoft.com/office/drawing/2014/main" val="10004"/>
-                  </a:ext>
-                </a:extLst>
               </a:tr>
             </a:tbl>
           </a:graphicData>
@@ -3777,7 +3613,7 @@
 </file>
 
 <file path=ppt/slides/slide3.xml><?xml version="1.0" encoding="utf-8"?>
-<p:sld xmlns:a="http://schemas.openxmlformats.org/drawingml/2006/main" xmlns:r="http://schemas.openxmlformats.org/officeDocument/2006/relationships" xmlns:p="http://schemas.openxmlformats.org/presentationml/2006/main">
+<p:sld xmlns:a="http://schemas.openxmlformats.org/drawingml/2006/main" xmlns:p="http://schemas.openxmlformats.org/presentationml/2006/main" xmlns:r="http://schemas.openxmlformats.org/officeDocument/2006/relationships">
   <p:cSld>
     <p:spTree>
       <p:nvGrpSpPr>
@@ -3785,14 +3621,7 @@
         <p:cNvGrpSpPr/>
         <p:nvPr/>
       </p:nvGrpSpPr>
-      <p:grpSpPr>
-        <a:xfrm>
-          <a:off x="0" y="0"/>
-          <a:ext cx="0" cy="0"/>
-          <a:chOff x="0" y="0"/>
-          <a:chExt cx="0" cy="0"/>
-        </a:xfrm>
-      </p:grpSpPr>
+      <p:grpSpPr/>
       <p:sp>
         <p:nvSpPr>
           <p:cNvPr id="2" name="Title 1"/>
@@ -3805,9 +3634,7 @@
         </p:nvSpPr>
         <p:spPr/>
         <p:txBody>
-          <a:bodyPr>
-            <a:normAutofit fontScale="90000"/>
-          </a:bodyPr>
+          <a:bodyPr/>
           <a:lstStyle/>
           <a:p>
             <a:r>
@@ -3822,17 +3649,11 @@
           <p:cNvGraphicFramePr>
             <a:graphicFrameLocks noGrp="1"/>
           </p:cNvGraphicFramePr>
-          <p:nvPr>
-            <p:extLst>
-              <p:ext uri="{D42A27DB-BD31-4B8C-83A1-F6EECF244321}">
-                <p14:modId xmlns:p14="http://schemas.microsoft.com/office/powerpoint/2010/main" val="1633994400"/>
-              </p:ext>
-            </p:extLst>
-          </p:nvPr>
+          <p:nvPr/>
         </p:nvGraphicFramePr>
         <p:xfrm>
-          <a:off x="457200" y="2167247"/>
-          <a:ext cx="8229600" cy="2987040"/>
+          <a:off x="457200" y="1371600"/>
+          <a:ext cx="8229600" cy="2743200"/>
         </p:xfrm>
         <a:graphic>
           <a:graphicData uri="http://schemas.openxmlformats.org/drawingml/2006/table">
@@ -3841,41 +3662,11 @@
                 <a:tableStyleId>{5C22544A-7EE6-4342-B048-85BDC9FD1C3A}</a:tableStyleId>
               </a:tblPr>
               <a:tblGrid>
-                <a:gridCol w="1645920">
-                  <a:extLst>
-                    <a:ext uri="{9D8B030D-6E8A-4147-A177-3AD203B41FA5}">
-                      <a16:colId xmlns:a16="http://schemas.microsoft.com/office/drawing/2014/main" val="20000"/>
-                    </a:ext>
-                  </a:extLst>
-                </a:gridCol>
-                <a:gridCol w="1645920">
-                  <a:extLst>
-                    <a:ext uri="{9D8B030D-6E8A-4147-A177-3AD203B41FA5}">
-                      <a16:colId xmlns:a16="http://schemas.microsoft.com/office/drawing/2014/main" val="20001"/>
-                    </a:ext>
-                  </a:extLst>
-                </a:gridCol>
-                <a:gridCol w="1645920">
-                  <a:extLst>
-                    <a:ext uri="{9D8B030D-6E8A-4147-A177-3AD203B41FA5}">
-                      <a16:colId xmlns:a16="http://schemas.microsoft.com/office/drawing/2014/main" val="20002"/>
-                    </a:ext>
-                  </a:extLst>
-                </a:gridCol>
-                <a:gridCol w="1645920">
-                  <a:extLst>
-                    <a:ext uri="{9D8B030D-6E8A-4147-A177-3AD203B41FA5}">
-                      <a16:colId xmlns:a16="http://schemas.microsoft.com/office/drawing/2014/main" val="20003"/>
-                    </a:ext>
-                  </a:extLst>
-                </a:gridCol>
-                <a:gridCol w="1645920">
-                  <a:extLst>
-                    <a:ext uri="{9D8B030D-6E8A-4147-A177-3AD203B41FA5}">
-                      <a16:colId xmlns:a16="http://schemas.microsoft.com/office/drawing/2014/main" val="20004"/>
-                    </a:ext>
-                  </a:extLst>
-                </a:gridCol>
+                <a:gridCol w="1645920"/>
+                <a:gridCol w="1645920"/>
+                <a:gridCol w="1645920"/>
+                <a:gridCol w="1645920"/>
+                <a:gridCol w="1645920"/>
               </a:tblGrid>
               <a:tr h="457200">
                 <a:tc>
@@ -3891,7 +3682,6 @@
                         </a:defRPr>
                       </a:pPr>
                       <a:r>
-                        <a:rPr sz="2000" dirty="0"/>
                         <a:t>Year</a:t>
                       </a:r>
                     </a:p>
@@ -3915,7 +3705,6 @@
                         </a:defRPr>
                       </a:pPr>
                       <a:r>
-                        <a:rPr sz="2000"/>
                         <a:t>Max capacity</a:t>
                       </a:r>
                     </a:p>
@@ -3939,7 +3728,6 @@
                         </a:defRPr>
                       </a:pPr>
                       <a:r>
-                        <a:rPr sz="2000"/>
                         <a:t>Utilization %</a:t>
                       </a:r>
                     </a:p>
@@ -3963,7 +3751,6 @@
                         </a:defRPr>
                       </a:pPr>
                       <a:r>
-                        <a:rPr sz="2000"/>
                         <a:t>Scrap %</a:t>
                       </a:r>
                     </a:p>
@@ -3987,7 +3774,6 @@
                         </a:defRPr>
                       </a:pPr>
                       <a:r>
-                        <a:rPr sz="2000"/>
                         <a:t>Effective capacity</a:t>
                       </a:r>
                     </a:p>
@@ -3998,11 +3784,6 @@
                     </a:solidFill>
                   </a:tcPr>
                 </a:tc>
-                <a:extLst>
-                  <a:ext uri="{0D108BD9-81ED-4DB2-BD59-A6C34878D82A}">
-                    <a16:rowId xmlns:a16="http://schemas.microsoft.com/office/drawing/2014/main" val="10000"/>
-                  </a:ext>
-                </a:extLst>
               </a:tr>
               <a:tr h="457200">
                 <a:tc>
@@ -4014,7 +3795,6 @@
                         <a:defRPr sz="900" b="0"/>
                       </a:pPr>
                       <a:r>
-                        <a:rPr sz="2000"/>
                         <a:t>Year 1</a:t>
                       </a:r>
                     </a:p>
@@ -4034,7 +3814,6 @@
                         <a:defRPr sz="900" b="0"/>
                       </a:pPr>
                       <a:r>
-                        <a:rPr sz="2000"/>
                         <a:t>250</a:t>
                       </a:r>
                     </a:p>
@@ -4054,7 +3833,6 @@
                         <a:defRPr sz="900" b="0"/>
                       </a:pPr>
                       <a:r>
-                        <a:rPr sz="2000"/>
                         <a:t>50.0%</a:t>
                       </a:r>
                     </a:p>
@@ -4074,7 +3852,6 @@
                         <a:defRPr sz="900" b="0"/>
                       </a:pPr>
                       <a:r>
-                        <a:rPr sz="2000"/>
                         <a:t>5.0%</a:t>
                       </a:r>
                     </a:p>
@@ -4094,7 +3871,6 @@
                         <a:defRPr sz="900" b="0"/>
                       </a:pPr>
                       <a:r>
-                        <a:rPr sz="2000"/>
                         <a:t>118.75</a:t>
                       </a:r>
                     </a:p>
@@ -4105,11 +3881,6 @@
                     </a:solidFill>
                   </a:tcPr>
                 </a:tc>
-                <a:extLst>
-                  <a:ext uri="{0D108BD9-81ED-4DB2-BD59-A6C34878D82A}">
-                    <a16:rowId xmlns:a16="http://schemas.microsoft.com/office/drawing/2014/main" val="10001"/>
-                  </a:ext>
-                </a:extLst>
               </a:tr>
               <a:tr h="457200">
                 <a:tc>
@@ -4121,7 +3892,6 @@
                         <a:defRPr sz="900" b="0"/>
                       </a:pPr>
                       <a:r>
-                        <a:rPr sz="2000"/>
                         <a:t>Year 2</a:t>
                       </a:r>
                     </a:p>
@@ -4141,7 +3911,6 @@
                         <a:defRPr sz="900" b="0"/>
                       </a:pPr>
                       <a:r>
-                        <a:rPr sz="2000"/>
                         <a:t>250</a:t>
                       </a:r>
                     </a:p>
@@ -4161,7 +3930,6 @@
                         <a:defRPr sz="900" b="0"/>
                       </a:pPr>
                       <a:r>
-                        <a:rPr sz="2000"/>
                         <a:t>75.0%</a:t>
                       </a:r>
                     </a:p>
@@ -4181,7 +3949,6 @@
                         <a:defRPr sz="900" b="0"/>
                       </a:pPr>
                       <a:r>
-                        <a:rPr sz="2000"/>
                         <a:t>4.0%</a:t>
                       </a:r>
                     </a:p>
@@ -4201,7 +3968,6 @@
                         <a:defRPr sz="900" b="0"/>
                       </a:pPr>
                       <a:r>
-                        <a:rPr sz="2000"/>
                         <a:t>180.00</a:t>
                       </a:r>
                     </a:p>
@@ -4212,11 +3978,6 @@
                     </a:solidFill>
                   </a:tcPr>
                 </a:tc>
-                <a:extLst>
-                  <a:ext uri="{0D108BD9-81ED-4DB2-BD59-A6C34878D82A}">
-                    <a16:rowId xmlns:a16="http://schemas.microsoft.com/office/drawing/2014/main" val="10002"/>
-                  </a:ext>
-                </a:extLst>
               </a:tr>
               <a:tr h="457200">
                 <a:tc>
@@ -4228,7 +3989,6 @@
                         <a:defRPr sz="900" b="0"/>
                       </a:pPr>
                       <a:r>
-                        <a:rPr sz="2000"/>
                         <a:t>Year 3</a:t>
                       </a:r>
                     </a:p>
@@ -4248,7 +4008,6 @@
                         <a:defRPr sz="900" b="0"/>
                       </a:pPr>
                       <a:r>
-                        <a:rPr sz="2000"/>
                         <a:t>250</a:t>
                       </a:r>
                     </a:p>
@@ -4268,7 +4027,6 @@
                         <a:defRPr sz="900" b="0"/>
                       </a:pPr>
                       <a:r>
-                        <a:rPr sz="2000"/>
                         <a:t>90.0%</a:t>
                       </a:r>
                     </a:p>
@@ -4288,7 +4046,6 @@
                         <a:defRPr sz="900" b="0"/>
                       </a:pPr>
                       <a:r>
-                        <a:rPr sz="2000"/>
                         <a:t>3.0%</a:t>
                       </a:r>
                     </a:p>
@@ -4308,7 +4065,6 @@
                         <a:defRPr sz="900" b="0"/>
                       </a:pPr>
                       <a:r>
-                        <a:rPr sz="2000"/>
                         <a:t>218.25</a:t>
                       </a:r>
                     </a:p>
@@ -4319,11 +4075,6 @@
                     </a:solidFill>
                   </a:tcPr>
                 </a:tc>
-                <a:extLst>
-                  <a:ext uri="{0D108BD9-81ED-4DB2-BD59-A6C34878D82A}">
-                    <a16:rowId xmlns:a16="http://schemas.microsoft.com/office/drawing/2014/main" val="10003"/>
-                  </a:ext>
-                </a:extLst>
               </a:tr>
               <a:tr h="457200">
                 <a:tc>
@@ -4335,7 +4086,6 @@
                         <a:defRPr sz="900" b="0"/>
                       </a:pPr>
                       <a:r>
-                        <a:rPr sz="2000"/>
                         <a:t>Year 4</a:t>
                       </a:r>
                     </a:p>
@@ -4355,7 +4105,6 @@
                         <a:defRPr sz="900" b="0"/>
                       </a:pPr>
                       <a:r>
-                        <a:rPr sz="2000"/>
                         <a:t>250</a:t>
                       </a:r>
                     </a:p>
@@ -4375,7 +4124,6 @@
                         <a:defRPr sz="900" b="0"/>
                       </a:pPr>
                       <a:r>
-                        <a:rPr sz="2000"/>
                         <a:t>95.0%</a:t>
                       </a:r>
                     </a:p>
@@ -4395,7 +4143,6 @@
                         <a:defRPr sz="900" b="0"/>
                       </a:pPr>
                       <a:r>
-                        <a:rPr sz="2000"/>
                         <a:t>2.0%</a:t>
                       </a:r>
                     </a:p>
@@ -4415,7 +4162,6 @@
                         <a:defRPr sz="900" b="0"/>
                       </a:pPr>
                       <a:r>
-                        <a:rPr sz="2000"/>
                         <a:t>232.75</a:t>
                       </a:r>
                     </a:p>
@@ -4426,11 +4172,6 @@
                     </a:solidFill>
                   </a:tcPr>
                 </a:tc>
-                <a:extLst>
-                  <a:ext uri="{0D108BD9-81ED-4DB2-BD59-A6C34878D82A}">
-                    <a16:rowId xmlns:a16="http://schemas.microsoft.com/office/drawing/2014/main" val="10004"/>
-                  </a:ext>
-                </a:extLst>
               </a:tr>
               <a:tr h="457200">
                 <a:tc>
@@ -4442,7 +4183,6 @@
                         <a:defRPr sz="900" b="0"/>
                       </a:pPr>
                       <a:r>
-                        <a:rPr sz="2000"/>
                         <a:t>Year 5</a:t>
                       </a:r>
                     </a:p>
@@ -4462,7 +4202,6 @@
                         <a:defRPr sz="900" b="0"/>
                       </a:pPr>
                       <a:r>
-                        <a:rPr sz="2000"/>
                         <a:t>250</a:t>
                       </a:r>
                     </a:p>
@@ -4482,7 +4221,6 @@
                         <a:defRPr sz="900" b="0"/>
                       </a:pPr>
                       <a:r>
-                        <a:rPr sz="2000"/>
                         <a:t>100.0%</a:t>
                       </a:r>
                     </a:p>
@@ -4502,7 +4240,6 @@
                         <a:defRPr sz="900" b="0"/>
                       </a:pPr>
                       <a:r>
-                        <a:rPr sz="2000"/>
                         <a:t>2.0%</a:t>
                       </a:r>
                     </a:p>
@@ -4522,7 +4259,6 @@
                         <a:defRPr sz="900" b="0"/>
                       </a:pPr>
                       <a:r>
-                        <a:rPr sz="2000" dirty="0"/>
                         <a:t>245.00</a:t>
                       </a:r>
                     </a:p>
@@ -4533,11 +4269,6 @@
                     </a:solidFill>
                   </a:tcPr>
                 </a:tc>
-                <a:extLst>
-                  <a:ext uri="{0D108BD9-81ED-4DB2-BD59-A6C34878D82A}">
-                    <a16:rowId xmlns:a16="http://schemas.microsoft.com/office/drawing/2014/main" val="10005"/>
-                  </a:ext>
-                </a:extLst>
               </a:tr>
             </a:tbl>
           </a:graphicData>
@@ -4552,7 +4283,7 @@
 </file>
 
 <file path=ppt/slides/slide4.xml><?xml version="1.0" encoding="utf-8"?>
-<p:sld xmlns:a="http://schemas.openxmlformats.org/drawingml/2006/main" xmlns:r="http://schemas.openxmlformats.org/officeDocument/2006/relationships" xmlns:p="http://schemas.openxmlformats.org/presentationml/2006/main">
+<p:sld xmlns:a="http://schemas.openxmlformats.org/drawingml/2006/main" xmlns:p="http://schemas.openxmlformats.org/presentationml/2006/main" xmlns:r="http://schemas.openxmlformats.org/officeDocument/2006/relationships">
   <p:cSld>
     <p:spTree>
       <p:nvGrpSpPr>
@@ -4560,14 +4291,7 @@
         <p:cNvGrpSpPr/>
         <p:nvPr/>
       </p:nvGrpSpPr>
-      <p:grpSpPr>
-        <a:xfrm>
-          <a:off x="0" y="0"/>
-          <a:ext cx="0" cy="0"/>
-          <a:chOff x="0" y="0"/>
-          <a:chExt cx="0" cy="0"/>
-        </a:xfrm>
-      </p:grpSpPr>
+      <p:grpSpPr/>
       <p:sp>
         <p:nvSpPr>
           <p:cNvPr id="2" name="Title 1"/>
@@ -4580,9 +4304,7 @@
         </p:nvSpPr>
         <p:spPr/>
         <p:txBody>
-          <a:bodyPr>
-            <a:normAutofit fontScale="90000"/>
-          </a:bodyPr>
+          <a:bodyPr/>
           <a:lstStyle/>
           <a:p>
             <a:r>
@@ -4597,17 +4319,11 @@
           <p:cNvGraphicFramePr>
             <a:graphicFrameLocks noGrp="1"/>
           </p:cNvGraphicFramePr>
-          <p:nvPr>
-            <p:extLst>
-              <p:ext uri="{D42A27DB-BD31-4B8C-83A1-F6EECF244321}">
-                <p14:modId xmlns:p14="http://schemas.microsoft.com/office/powerpoint/2010/main" val="658561240"/>
-              </p:ext>
-            </p:extLst>
-          </p:nvPr>
+          <p:nvPr/>
         </p:nvGraphicFramePr>
         <p:xfrm>
-          <a:off x="457200" y="2297875"/>
-          <a:ext cx="8229600" cy="2987040"/>
+          <a:off x="457200" y="1371600"/>
+          <a:ext cx="8229600" cy="2743200"/>
         </p:xfrm>
         <a:graphic>
           <a:graphicData uri="http://schemas.openxmlformats.org/drawingml/2006/table">
@@ -4616,41 +4332,11 @@
                 <a:tableStyleId>{5C22544A-7EE6-4342-B048-85BDC9FD1C3A}</a:tableStyleId>
               </a:tblPr>
               <a:tblGrid>
-                <a:gridCol w="1645920">
-                  <a:extLst>
-                    <a:ext uri="{9D8B030D-6E8A-4147-A177-3AD203B41FA5}">
-                      <a16:colId xmlns:a16="http://schemas.microsoft.com/office/drawing/2014/main" val="20000"/>
-                    </a:ext>
-                  </a:extLst>
-                </a:gridCol>
-                <a:gridCol w="1645920">
-                  <a:extLst>
-                    <a:ext uri="{9D8B030D-6E8A-4147-A177-3AD203B41FA5}">
-                      <a16:colId xmlns:a16="http://schemas.microsoft.com/office/drawing/2014/main" val="20001"/>
-                    </a:ext>
-                  </a:extLst>
-                </a:gridCol>
-                <a:gridCol w="1645920">
-                  <a:extLst>
-                    <a:ext uri="{9D8B030D-6E8A-4147-A177-3AD203B41FA5}">
-                      <a16:colId xmlns:a16="http://schemas.microsoft.com/office/drawing/2014/main" val="20002"/>
-                    </a:ext>
-                  </a:extLst>
-                </a:gridCol>
-                <a:gridCol w="1645920">
-                  <a:extLst>
-                    <a:ext uri="{9D8B030D-6E8A-4147-A177-3AD203B41FA5}">
-                      <a16:colId xmlns:a16="http://schemas.microsoft.com/office/drawing/2014/main" val="20003"/>
-                    </a:ext>
-                  </a:extLst>
-                </a:gridCol>
-                <a:gridCol w="1645920">
-                  <a:extLst>
-                    <a:ext uri="{9D8B030D-6E8A-4147-A177-3AD203B41FA5}">
-                      <a16:colId xmlns:a16="http://schemas.microsoft.com/office/drawing/2014/main" val="20004"/>
-                    </a:ext>
-                  </a:extLst>
-                </a:gridCol>
+                <a:gridCol w="1645920"/>
+                <a:gridCol w="1645920"/>
+                <a:gridCol w="1645920"/>
+                <a:gridCol w="1645920"/>
+                <a:gridCol w="1645920"/>
               </a:tblGrid>
               <a:tr h="457200">
                 <a:tc>
@@ -4666,7 +4352,6 @@
                         </a:defRPr>
                       </a:pPr>
                       <a:r>
-                        <a:rPr sz="2000"/>
                         <a:t>Year</a:t>
                       </a:r>
                     </a:p>
@@ -4690,7 +4375,6 @@
                         </a:defRPr>
                       </a:pPr>
                       <a:r>
-                        <a:rPr sz="2000"/>
                         <a:t>Units sold</a:t>
                       </a:r>
                     </a:p>
@@ -4714,7 +4398,6 @@
                         </a:defRPr>
                       </a:pPr>
                       <a:r>
-                        <a:rPr sz="2000"/>
                         <a:t>Price (EUR/unit)</a:t>
                       </a:r>
                     </a:p>
@@ -4738,7 +4421,6 @@
                         </a:defRPr>
                       </a:pPr>
                       <a:r>
-                        <a:rPr sz="2000"/>
                         <a:t>Revenue (EUR)</a:t>
                       </a:r>
                     </a:p>
@@ -4762,7 +4444,6 @@
                         </a:defRPr>
                       </a:pPr>
                       <a:r>
-                        <a:rPr sz="2000"/>
                         <a:t>Justification (short)</a:t>
                       </a:r>
                     </a:p>
@@ -4773,11 +4454,6 @@
                     </a:solidFill>
                   </a:tcPr>
                 </a:tc>
-                <a:extLst>
-                  <a:ext uri="{0D108BD9-81ED-4DB2-BD59-A6C34878D82A}">
-                    <a16:rowId xmlns:a16="http://schemas.microsoft.com/office/drawing/2014/main" val="10000"/>
-                  </a:ext>
-                </a:extLst>
               </a:tr>
               <a:tr h="457200">
                 <a:tc>
@@ -4789,7 +4465,6 @@
                         <a:defRPr sz="900" b="0"/>
                       </a:pPr>
                       <a:r>
-                        <a:rPr sz="2000"/>
                         <a:t>Year 1</a:t>
                       </a:r>
                     </a:p>
@@ -4809,7 +4484,6 @@
                         <a:defRPr sz="900" b="0"/>
                       </a:pPr>
                       <a:r>
-                        <a:rPr sz="2000"/>
                         <a:t>118.75</a:t>
                       </a:r>
                     </a:p>
@@ -4829,7 +4503,6 @@
                         <a:defRPr sz="900" b="0"/>
                       </a:pPr>
                       <a:r>
-                        <a:rPr sz="2000"/>
                         <a:t>126,000</a:t>
                       </a:r>
                     </a:p>
@@ -4849,7 +4522,6 @@
                         <a:defRPr sz="900" b="0"/>
                       </a:pPr>
                       <a:r>
-                        <a:rPr sz="2000"/>
                         <a:t>14,962,500</a:t>
                       </a:r>
                     </a:p>
@@ -4869,7 +4541,6 @@
                         <a:defRPr sz="900" b="0"/>
                       </a:pPr>
                       <a:r>
-                        <a:rPr sz="2000"/>
                         <a:t>Market entry</a:t>
                       </a:r>
                     </a:p>
@@ -4880,11 +4551,6 @@
                     </a:solidFill>
                   </a:tcPr>
                 </a:tc>
-                <a:extLst>
-                  <a:ext uri="{0D108BD9-81ED-4DB2-BD59-A6C34878D82A}">
-                    <a16:rowId xmlns:a16="http://schemas.microsoft.com/office/drawing/2014/main" val="10001"/>
-                  </a:ext>
-                </a:extLst>
               </a:tr>
               <a:tr h="457200">
                 <a:tc>
@@ -4896,7 +4562,6 @@
                         <a:defRPr sz="900" b="0"/>
                       </a:pPr>
                       <a:r>
-                        <a:rPr sz="2000"/>
                         <a:t>Year 2</a:t>
                       </a:r>
                     </a:p>
@@ -4916,7 +4581,6 @@
                         <a:defRPr sz="900" b="0"/>
                       </a:pPr>
                       <a:r>
-                        <a:rPr sz="2000"/>
                         <a:t>180.00</a:t>
                       </a:r>
                     </a:p>
@@ -4936,7 +4600,6 @@
                         <a:defRPr sz="900" b="0"/>
                       </a:pPr>
                       <a:r>
-                        <a:rPr sz="2000"/>
                         <a:t>123,480</a:t>
                       </a:r>
                     </a:p>
@@ -4956,7 +4619,6 @@
                         <a:defRPr sz="900" b="0"/>
                       </a:pPr>
                       <a:r>
-                        <a:rPr sz="2000"/>
                         <a:t>22,226,400</a:t>
                       </a:r>
                     </a:p>
@@ -4976,7 +4638,6 @@
                         <a:defRPr sz="900" b="0"/>
                       </a:pPr>
                       <a:r>
-                        <a:rPr sz="2000"/>
                         <a:t>Growth phase</a:t>
                       </a:r>
                     </a:p>
@@ -4987,11 +4648,6 @@
                     </a:solidFill>
                   </a:tcPr>
                 </a:tc>
-                <a:extLst>
-                  <a:ext uri="{0D108BD9-81ED-4DB2-BD59-A6C34878D82A}">
-                    <a16:rowId xmlns:a16="http://schemas.microsoft.com/office/drawing/2014/main" val="10002"/>
-                  </a:ext>
-                </a:extLst>
               </a:tr>
               <a:tr h="457200">
                 <a:tc>
@@ -5003,7 +4659,6 @@
                         <a:defRPr sz="900" b="0"/>
                       </a:pPr>
                       <a:r>
-                        <a:rPr sz="2000"/>
                         <a:t>Year 3</a:t>
                       </a:r>
                     </a:p>
@@ -5023,7 +4678,6 @@
                         <a:defRPr sz="900" b="0"/>
                       </a:pPr>
                       <a:r>
-                        <a:rPr sz="2000"/>
                         <a:t>218.25</a:t>
                       </a:r>
                     </a:p>
@@ -5043,7 +4697,6 @@
                         <a:defRPr sz="900" b="0"/>
                       </a:pPr>
                       <a:r>
-                        <a:rPr sz="2000"/>
                         <a:t>121,010</a:t>
                       </a:r>
                     </a:p>
@@ -5063,7 +4716,6 @@
                         <a:defRPr sz="900" b="0"/>
                       </a:pPr>
                       <a:r>
-                        <a:rPr sz="2000"/>
                         <a:t>26,410,520</a:t>
                       </a:r>
                     </a:p>
@@ -5083,7 +4735,6 @@
                         <a:defRPr sz="900" b="0"/>
                       </a:pPr>
                       <a:r>
-                        <a:rPr sz="2000"/>
                         <a:t>Scale reach</a:t>
                       </a:r>
                     </a:p>
@@ -5094,11 +4745,6 @@
                     </a:solidFill>
                   </a:tcPr>
                 </a:tc>
-                <a:extLst>
-                  <a:ext uri="{0D108BD9-81ED-4DB2-BD59-A6C34878D82A}">
-                    <a16:rowId xmlns:a16="http://schemas.microsoft.com/office/drawing/2014/main" val="10003"/>
-                  </a:ext>
-                </a:extLst>
               </a:tr>
               <a:tr h="457200">
                 <a:tc>
@@ -5110,7 +4756,6 @@
                         <a:defRPr sz="900" b="0"/>
                       </a:pPr>
                       <a:r>
-                        <a:rPr sz="2000"/>
                         <a:t>Year 4</a:t>
                       </a:r>
                     </a:p>
@@ -5130,7 +4775,6 @@
                         <a:defRPr sz="900" b="0"/>
                       </a:pPr>
                       <a:r>
-                        <a:rPr sz="2000"/>
                         <a:t>232.75</a:t>
                       </a:r>
                     </a:p>
@@ -5150,7 +4794,6 @@
                         <a:defRPr sz="900" b="0"/>
                       </a:pPr>
                       <a:r>
-                        <a:rPr sz="2000"/>
                         <a:t>118,590</a:t>
                       </a:r>
                     </a:p>
@@ -5170,7 +4813,6 @@
                         <a:defRPr sz="900" b="0"/>
                       </a:pPr>
                       <a:r>
-                        <a:rPr sz="2000"/>
                         <a:t>27,601,867</a:t>
                       </a:r>
                     </a:p>
@@ -5190,7 +4832,6 @@
                         <a:defRPr sz="900" b="0"/>
                       </a:pPr>
                       <a:r>
-                        <a:rPr sz="2000"/>
                         <a:t>Maturity</a:t>
                       </a:r>
                     </a:p>
@@ -5201,11 +4842,6 @@
                     </a:solidFill>
                   </a:tcPr>
                 </a:tc>
-                <a:extLst>
-                  <a:ext uri="{0D108BD9-81ED-4DB2-BD59-A6C34878D82A}">
-                    <a16:rowId xmlns:a16="http://schemas.microsoft.com/office/drawing/2014/main" val="10004"/>
-                  </a:ext>
-                </a:extLst>
               </a:tr>
               <a:tr h="457200">
                 <a:tc>
@@ -5217,7 +4853,6 @@
                         <a:defRPr sz="900" b="0"/>
                       </a:pPr>
                       <a:r>
-                        <a:rPr sz="2000"/>
                         <a:t>Year 5</a:t>
                       </a:r>
                     </a:p>
@@ -5237,7 +4872,6 @@
                         <a:defRPr sz="900" b="0"/>
                       </a:pPr>
                       <a:r>
-                        <a:rPr sz="2000"/>
                         <a:t>245.00</a:t>
                       </a:r>
                     </a:p>
@@ -5257,7 +4891,6 @@
                         <a:defRPr sz="900" b="0"/>
                       </a:pPr>
                       <a:r>
-                        <a:rPr sz="2000"/>
                         <a:t>116,218</a:t>
                       </a:r>
                     </a:p>
@@ -5277,7 +4910,6 @@
                         <a:defRPr sz="900" b="0"/>
                       </a:pPr>
                       <a:r>
-                        <a:rPr sz="2000"/>
                         <a:t>28,473,505</a:t>
                       </a:r>
                     </a:p>
@@ -5297,7 +4929,6 @@
                         <a:defRPr sz="900" b="0"/>
                       </a:pPr>
                       <a:r>
-                        <a:rPr sz="2000" dirty="0"/>
                         <a:t>Full capacity</a:t>
                       </a:r>
                     </a:p>
@@ -5308,11 +4939,6 @@
                     </a:solidFill>
                   </a:tcPr>
                 </a:tc>
-                <a:extLst>
-                  <a:ext uri="{0D108BD9-81ED-4DB2-BD59-A6C34878D82A}">
-                    <a16:rowId xmlns:a16="http://schemas.microsoft.com/office/drawing/2014/main" val="10005"/>
-                  </a:ext>
-                </a:extLst>
               </a:tr>
             </a:tbl>
           </a:graphicData>
@@ -5327,7 +4953,7 @@
 </file>
 
 <file path=ppt/slides/slide5.xml><?xml version="1.0" encoding="utf-8"?>
-<p:sld xmlns:a="http://schemas.openxmlformats.org/drawingml/2006/main" xmlns:r="http://schemas.openxmlformats.org/officeDocument/2006/relationships" xmlns:p="http://schemas.openxmlformats.org/presentationml/2006/main">
+<p:sld xmlns:a="http://schemas.openxmlformats.org/drawingml/2006/main" xmlns:p="http://schemas.openxmlformats.org/presentationml/2006/main" xmlns:r="http://schemas.openxmlformats.org/officeDocument/2006/relationships">
   <p:cSld>
     <p:spTree>
       <p:nvGrpSpPr>
@@ -5335,14 +4961,7 @@
         <p:cNvGrpSpPr/>
         <p:nvPr/>
       </p:nvGrpSpPr>
-      <p:grpSpPr>
-        <a:xfrm>
-          <a:off x="0" y="0"/>
-          <a:ext cx="0" cy="0"/>
-          <a:chOff x="0" y="0"/>
-          <a:chExt cx="0" cy="0"/>
-        </a:xfrm>
-      </p:grpSpPr>
+      <p:grpSpPr/>
       <p:sp>
         <p:nvSpPr>
           <p:cNvPr id="2" name="Title 1"/>
@@ -5355,9 +4974,7 @@
         </p:nvSpPr>
         <p:spPr/>
         <p:txBody>
-          <a:bodyPr>
-            <a:normAutofit fontScale="90000"/>
-          </a:bodyPr>
+          <a:bodyPr/>
           <a:lstStyle/>
           <a:p>
             <a:r>
@@ -5372,17 +4989,11 @@
           <p:cNvGraphicFramePr>
             <a:graphicFrameLocks noGrp="1"/>
           </p:cNvGraphicFramePr>
-          <p:nvPr>
-            <p:extLst>
-              <p:ext uri="{D42A27DB-BD31-4B8C-83A1-F6EECF244321}">
-                <p14:modId xmlns:p14="http://schemas.microsoft.com/office/powerpoint/2010/main" val="2352045227"/>
-              </p:ext>
-            </p:extLst>
-          </p:nvPr>
+          <p:nvPr/>
         </p:nvGraphicFramePr>
         <p:xfrm>
-          <a:off x="457200" y="1941616"/>
-          <a:ext cx="8229600" cy="3474720"/>
+          <a:off x="457200" y="1371600"/>
+          <a:ext cx="8229600" cy="2743200"/>
         </p:xfrm>
         <a:graphic>
           <a:graphicData uri="http://schemas.openxmlformats.org/drawingml/2006/table">
@@ -5391,41 +5002,11 @@
                 <a:tableStyleId>{5C22544A-7EE6-4342-B048-85BDC9FD1C3A}</a:tableStyleId>
               </a:tblPr>
               <a:tblGrid>
-                <a:gridCol w="1645920">
-                  <a:extLst>
-                    <a:ext uri="{9D8B030D-6E8A-4147-A177-3AD203B41FA5}">
-                      <a16:colId xmlns:a16="http://schemas.microsoft.com/office/drawing/2014/main" val="20000"/>
-                    </a:ext>
-                  </a:extLst>
-                </a:gridCol>
-                <a:gridCol w="1645920">
-                  <a:extLst>
-                    <a:ext uri="{9D8B030D-6E8A-4147-A177-3AD203B41FA5}">
-                      <a16:colId xmlns:a16="http://schemas.microsoft.com/office/drawing/2014/main" val="20001"/>
-                    </a:ext>
-                  </a:extLst>
-                </a:gridCol>
-                <a:gridCol w="1645920">
-                  <a:extLst>
-                    <a:ext uri="{9D8B030D-6E8A-4147-A177-3AD203B41FA5}">
-                      <a16:colId xmlns:a16="http://schemas.microsoft.com/office/drawing/2014/main" val="20002"/>
-                    </a:ext>
-                  </a:extLst>
-                </a:gridCol>
-                <a:gridCol w="1645920">
-                  <a:extLst>
-                    <a:ext uri="{9D8B030D-6E8A-4147-A177-3AD203B41FA5}">
-                      <a16:colId xmlns:a16="http://schemas.microsoft.com/office/drawing/2014/main" val="20003"/>
-                    </a:ext>
-                  </a:extLst>
-                </a:gridCol>
-                <a:gridCol w="1645920">
-                  <a:extLst>
-                    <a:ext uri="{9D8B030D-6E8A-4147-A177-3AD203B41FA5}">
-                      <a16:colId xmlns:a16="http://schemas.microsoft.com/office/drawing/2014/main" val="20004"/>
-                    </a:ext>
-                  </a:extLst>
-                </a:gridCol>
+                <a:gridCol w="1645920"/>
+                <a:gridCol w="1645920"/>
+                <a:gridCol w="1645920"/>
+                <a:gridCol w="1645920"/>
+                <a:gridCol w="1645920"/>
               </a:tblGrid>
               <a:tr h="457200">
                 <a:tc>
@@ -5441,7 +5022,6 @@
                         </a:defRPr>
                       </a:pPr>
                       <a:r>
-                        <a:rPr sz="2000"/>
                         <a:t>Component</a:t>
                       </a:r>
                     </a:p>
@@ -5465,7 +5045,6 @@
                         </a:defRPr>
                       </a:pPr>
                       <a:r>
-                        <a:rPr sz="2000"/>
                         <a:t>Driver</a:t>
                       </a:r>
                     </a:p>
@@ -5489,7 +5068,6 @@
                         </a:defRPr>
                       </a:pPr>
                       <a:r>
-                        <a:rPr sz="2000"/>
                         <a:t>Formula</a:t>
                       </a:r>
                     </a:p>
@@ -5513,7 +5091,6 @@
                         </a:defRPr>
                       </a:pPr>
                       <a:r>
-                        <a:rPr sz="2000"/>
                         <a:t>EUR/unit</a:t>
                       </a:r>
                     </a:p>
@@ -5537,7 +5114,6 @@
                         </a:defRPr>
                       </a:pPr>
                       <a:r>
-                        <a:rPr sz="2000"/>
                         <a:t>Source</a:t>
                       </a:r>
                     </a:p>
@@ -5548,11 +5124,6 @@
                     </a:solidFill>
                   </a:tcPr>
                 </a:tc>
-                <a:extLst>
-                  <a:ext uri="{0D108BD9-81ED-4DB2-BD59-A6C34878D82A}">
-                    <a16:rowId xmlns:a16="http://schemas.microsoft.com/office/drawing/2014/main" val="10000"/>
-                  </a:ext>
-                </a:extLst>
               </a:tr>
               <a:tr h="457200">
                 <a:tc>
@@ -5564,7 +5135,6 @@
                         <a:defRPr sz="900" b="0"/>
                       </a:pPr>
                       <a:r>
-                        <a:rPr sz="2000"/>
                         <a:t>Materials/ingredients</a:t>
                       </a:r>
                     </a:p>
@@ -5584,31 +5154,25 @@
                         <a:defRPr sz="900" b="0"/>
                       </a:pPr>
                       <a:r>
-                        <a:rPr sz="2000" dirty="0" err="1"/>
-                        <a:t>LONGi</a:t>
-                      </a:r>
-                      <a:r>
-                        <a:rPr sz="2000" dirty="0"/>
-                        <a:t> HPBC 2.0</a:t>
-                      </a:r>
-                    </a:p>
-                  </a:txBody>
-                  <a:tcPr>
-                    <a:solidFill>
-                      <a:srgbClr val="FFFFFF"/>
-                    </a:solidFill>
-                  </a:tcPr>
-                </a:tc>
-                <a:tc>
-                  <a:txBody>
-                    <a:bodyPr/>
-                    <a:lstStyle/>
-                    <a:p>
-                      <a:pPr algn="ctr">
-                        <a:defRPr sz="900" b="0"/>
-                      </a:pPr>
-                      <a:r>
-                        <a:rPr sz="2000"/>
+                        <a:t>LONGi HPBC 2.0</a:t>
+                      </a:r>
+                    </a:p>
+                  </a:txBody>
+                  <a:tcPr>
+                    <a:solidFill>
+                      <a:srgbClr val="FFFFFF"/>
+                    </a:solidFill>
+                  </a:tcPr>
+                </a:tc>
+                <a:tc>
+                  <a:txBody>
+                    <a:bodyPr/>
+                    <a:lstStyle/>
+                    <a:p>
+                      <a:pPr algn="ctr">
+                        <a:defRPr sz="900" b="0"/>
+                      </a:pPr>
+                      <a:r>
                         <a:t>Direct</a:t>
                       </a:r>
                     </a:p>
@@ -5628,7 +5192,6 @@
                         <a:defRPr sz="900" b="0"/>
                       </a:pPr>
                       <a:r>
-                        <a:rPr sz="2000"/>
                         <a:t>80,700</a:t>
                       </a:r>
                     </a:p>
@@ -5648,7 +5211,6 @@
                         <a:defRPr sz="900" b="0"/>
                       </a:pPr>
                       <a:r>
-                        <a:rPr sz="2000"/>
                         <a:t>LONGi 2025 Spec</a:t>
                       </a:r>
                     </a:p>
@@ -5659,11 +5221,6 @@
                     </a:solidFill>
                   </a:tcPr>
                 </a:tc>
-                <a:extLst>
-                  <a:ext uri="{0D108BD9-81ED-4DB2-BD59-A6C34878D82A}">
-                    <a16:rowId xmlns:a16="http://schemas.microsoft.com/office/drawing/2014/main" val="10001"/>
-                  </a:ext>
-                </a:extLst>
               </a:tr>
               <a:tr h="457200">
                 <a:tc>
@@ -5675,7 +5232,6 @@
                         <a:defRPr sz="900" b="0"/>
                       </a:pPr>
                       <a:r>
-                        <a:rPr sz="2000"/>
                         <a:t>Packaging</a:t>
                       </a:r>
                     </a:p>
@@ -5695,7 +5251,6 @@
                         <a:defRPr sz="900" b="0"/>
                       </a:pPr>
                       <a:r>
-                        <a:rPr sz="2000"/>
                         <a:t>Export grade</a:t>
                       </a:r>
                     </a:p>
@@ -5715,7 +5270,6 @@
                         <a:defRPr sz="900" b="0"/>
                       </a:pPr>
                       <a:r>
-                        <a:rPr sz="2000"/>
                         <a:t>Fixed</a:t>
                       </a:r>
                     </a:p>
@@ -5735,7 +5289,6 @@
                         <a:defRPr sz="900" b="0"/>
                       </a:pPr>
                       <a:r>
-                        <a:rPr sz="2000"/>
                         <a:t>1,500</a:t>
                       </a:r>
                     </a:p>
@@ -5755,7 +5308,6 @@
                         <a:defRPr sz="900" b="0"/>
                       </a:pPr>
                       <a:r>
-                        <a:rPr sz="2000"/>
                         <a:t>Logistics Spec</a:t>
                       </a:r>
                     </a:p>
@@ -5766,11 +5318,6 @@
                     </a:solidFill>
                   </a:tcPr>
                 </a:tc>
-                <a:extLst>
-                  <a:ext uri="{0D108BD9-81ED-4DB2-BD59-A6C34878D82A}">
-                    <a16:rowId xmlns:a16="http://schemas.microsoft.com/office/drawing/2014/main" val="10002"/>
-                  </a:ext>
-                </a:extLst>
               </a:tr>
               <a:tr h="457200">
                 <a:tc>
@@ -5782,7 +5329,6 @@
                         <a:defRPr sz="900" b="0"/>
                       </a:pPr>
                       <a:r>
-                        <a:rPr sz="2000"/>
                         <a:t>Direct labor</a:t>
                       </a:r>
                     </a:p>
@@ -5802,7 +5348,6 @@
                         <a:defRPr sz="900" b="0"/>
                       </a:pPr>
                       <a:r>
-                        <a:rPr sz="2000"/>
                         <a:t>Lithuania Min</a:t>
                       </a:r>
                     </a:p>
@@ -5822,7 +5367,6 @@
                         <a:defRPr sz="900" b="0"/>
                       </a:pPr>
                       <a:r>
-                        <a:rPr sz="2000"/>
                         <a:t>800h * 16.5</a:t>
                       </a:r>
                     </a:p>
@@ -5842,7 +5386,6 @@
                         <a:defRPr sz="900" b="0"/>
                       </a:pPr>
                       <a:r>
-                        <a:rPr sz="2000"/>
                         <a:t>13,200</a:t>
                       </a:r>
                     </a:p>
@@ -5862,7 +5405,6 @@
                         <a:defRPr sz="900" b="0"/>
                       </a:pPr>
                       <a:r>
-                        <a:rPr sz="2000"/>
                         <a:t>VDI 2026 Std</a:t>
                       </a:r>
                     </a:p>
@@ -5873,11 +5415,6 @@
                     </a:solidFill>
                   </a:tcPr>
                 </a:tc>
-                <a:extLst>
-                  <a:ext uri="{0D108BD9-81ED-4DB2-BD59-A6C34878D82A}">
-                    <a16:rowId xmlns:a16="http://schemas.microsoft.com/office/drawing/2014/main" val="10003"/>
-                  </a:ext>
-                </a:extLst>
               </a:tr>
               <a:tr h="457200">
                 <a:tc>
@@ -5889,7 +5426,6 @@
                         <a:defRPr sz="900" b="0"/>
                       </a:pPr>
                       <a:r>
-                        <a:rPr sz="2000"/>
                         <a:t>Energy (if relevant)</a:t>
                       </a:r>
                     </a:p>
@@ -5909,7 +5445,6 @@
                         <a:defRPr sz="900" b="0"/>
                       </a:pPr>
                       <a:r>
-                        <a:rPr sz="2000"/>
                         <a:t>Industrial rate</a:t>
                       </a:r>
                     </a:p>
@@ -5929,7 +5464,6 @@
                         <a:defRPr sz="900" b="0"/>
                       </a:pPr>
                       <a:r>
-                        <a:rPr sz="2000"/>
                         <a:t>0.18/kWh</a:t>
                       </a:r>
                     </a:p>
@@ -5949,7 +5483,6 @@
                         <a:defRPr sz="900" b="0"/>
                       </a:pPr>
                       <a:r>
-                        <a:rPr sz="2000"/>
                         <a:t>2,500</a:t>
                       </a:r>
                     </a:p>
@@ -5969,7 +5502,6 @@
                         <a:defRPr sz="900" b="0"/>
                       </a:pPr>
                       <a:r>
-                        <a:rPr sz="2000"/>
                         <a:t>Eurostat</a:t>
                       </a:r>
                     </a:p>
@@ -5980,11 +5512,6 @@
                     </a:solidFill>
                   </a:tcPr>
                 </a:tc>
-                <a:extLst>
-                  <a:ext uri="{0D108BD9-81ED-4DB2-BD59-A6C34878D82A}">
-                    <a16:rowId xmlns:a16="http://schemas.microsoft.com/office/drawing/2014/main" val="10004"/>
-                  </a:ext>
-                </a:extLst>
               </a:tr>
               <a:tr h="457200">
                 <a:tc>
@@ -5996,7 +5523,6 @@
                         <a:defRPr sz="900" b="0"/>
                       </a:pPr>
                       <a:r>
-                        <a:rPr sz="2000"/>
                         <a:t>Platform fee / other</a:t>
                       </a:r>
                     </a:p>
@@ -6016,7 +5542,6 @@
                         <a:defRPr sz="900" b="0"/>
                       </a:pPr>
                       <a:r>
-                        <a:rPr sz="2000"/>
                         <a:t>Scrap Effect</a:t>
                       </a:r>
                     </a:p>
@@ -6036,7 +5561,6 @@
                         <a:defRPr sz="900" b="0"/>
                       </a:pPr>
                       <a:r>
-                        <a:rPr sz="2000"/>
                         <a:t>Cost/(1-S)-C</a:t>
                       </a:r>
                     </a:p>
@@ -6056,7 +5580,6 @@
                         <a:defRPr sz="900" b="0"/>
                       </a:pPr>
                       <a:r>
-                        <a:rPr sz="2000"/>
                         <a:t>1,998</a:t>
                       </a:r>
                     </a:p>
@@ -6076,7 +5599,6 @@
                         <a:defRPr sz="900" b="0"/>
                       </a:pPr>
                       <a:r>
-                        <a:rPr sz="2000" dirty="0"/>
                         <a:t>Industry Std</a:t>
                       </a:r>
                     </a:p>
@@ -6087,11 +5609,6 @@
                     </a:solidFill>
                   </a:tcPr>
                 </a:tc>
-                <a:extLst>
-                  <a:ext uri="{0D108BD9-81ED-4DB2-BD59-A6C34878D82A}">
-                    <a16:rowId xmlns:a16="http://schemas.microsoft.com/office/drawing/2014/main" val="10005"/>
-                  </a:ext>
-                </a:extLst>
               </a:tr>
             </a:tbl>
           </a:graphicData>
@@ -6106,7 +5623,7 @@
 </file>
 
 <file path=ppt/slides/slide6.xml><?xml version="1.0" encoding="utf-8"?>
-<p:sld xmlns:a="http://schemas.openxmlformats.org/drawingml/2006/main" xmlns:r="http://schemas.openxmlformats.org/officeDocument/2006/relationships" xmlns:p="http://schemas.openxmlformats.org/presentationml/2006/main">
+<p:sld xmlns:a="http://schemas.openxmlformats.org/drawingml/2006/main" xmlns:p="http://schemas.openxmlformats.org/presentationml/2006/main" xmlns:r="http://schemas.openxmlformats.org/officeDocument/2006/relationships">
   <p:cSld>
     <p:spTree>
       <p:nvGrpSpPr>
@@ -6114,14 +5631,7 @@
         <p:cNvGrpSpPr/>
         <p:nvPr/>
       </p:nvGrpSpPr>
-      <p:grpSpPr>
-        <a:xfrm>
-          <a:off x="0" y="0"/>
-          <a:ext cx="0" cy="0"/>
-          <a:chOff x="0" y="0"/>
-          <a:chExt cx="0" cy="0"/>
-        </a:xfrm>
-      </p:grpSpPr>
+      <p:grpSpPr/>
       <p:sp>
         <p:nvSpPr>
           <p:cNvPr id="2" name="Title 1"/>
@@ -6134,9 +5644,7 @@
         </p:nvSpPr>
         <p:spPr/>
         <p:txBody>
-          <a:bodyPr>
-            <a:normAutofit fontScale="90000"/>
-          </a:bodyPr>
+          <a:bodyPr/>
           <a:lstStyle/>
           <a:p>
             <a:r>
@@ -6151,17 +5659,11 @@
           <p:cNvGraphicFramePr>
             <a:graphicFrameLocks noGrp="1"/>
           </p:cNvGraphicFramePr>
-          <p:nvPr>
-            <p:extLst>
-              <p:ext uri="{D42A27DB-BD31-4B8C-83A1-F6EECF244321}">
-                <p14:modId xmlns:p14="http://schemas.microsoft.com/office/powerpoint/2010/main" val="2737714028"/>
-              </p:ext>
-            </p:extLst>
-          </p:nvPr>
+          <p:nvPr/>
         </p:nvGraphicFramePr>
         <p:xfrm>
-          <a:off x="457200" y="1935480"/>
-          <a:ext cx="8229600" cy="2987040"/>
+          <a:off x="457200" y="1371600"/>
+          <a:ext cx="8229600" cy="2743200"/>
         </p:xfrm>
         <a:graphic>
           <a:graphicData uri="http://schemas.openxmlformats.org/drawingml/2006/table">
@@ -6170,48 +5672,12 @@
                 <a:tableStyleId>{5C22544A-7EE6-4342-B048-85BDC9FD1C3A}</a:tableStyleId>
               </a:tblPr>
               <a:tblGrid>
-                <a:gridCol w="1371600">
-                  <a:extLst>
-                    <a:ext uri="{9D8B030D-6E8A-4147-A177-3AD203B41FA5}">
-                      <a16:colId xmlns:a16="http://schemas.microsoft.com/office/drawing/2014/main" val="20000"/>
-                    </a:ext>
-                  </a:extLst>
-                </a:gridCol>
-                <a:gridCol w="1371600">
-                  <a:extLst>
-                    <a:ext uri="{9D8B030D-6E8A-4147-A177-3AD203B41FA5}">
-                      <a16:colId xmlns:a16="http://schemas.microsoft.com/office/drawing/2014/main" val="20001"/>
-                    </a:ext>
-                  </a:extLst>
-                </a:gridCol>
-                <a:gridCol w="1371600">
-                  <a:extLst>
-                    <a:ext uri="{9D8B030D-6E8A-4147-A177-3AD203B41FA5}">
-                      <a16:colId xmlns:a16="http://schemas.microsoft.com/office/drawing/2014/main" val="20002"/>
-                    </a:ext>
-                  </a:extLst>
-                </a:gridCol>
-                <a:gridCol w="1371600">
-                  <a:extLst>
-                    <a:ext uri="{9D8B030D-6E8A-4147-A177-3AD203B41FA5}">
-                      <a16:colId xmlns:a16="http://schemas.microsoft.com/office/drawing/2014/main" val="20003"/>
-                    </a:ext>
-                  </a:extLst>
-                </a:gridCol>
-                <a:gridCol w="1371600">
-                  <a:extLst>
-                    <a:ext uri="{9D8B030D-6E8A-4147-A177-3AD203B41FA5}">
-                      <a16:colId xmlns:a16="http://schemas.microsoft.com/office/drawing/2014/main" val="20004"/>
-                    </a:ext>
-                  </a:extLst>
-                </a:gridCol>
-                <a:gridCol w="1371600">
-                  <a:extLst>
-                    <a:ext uri="{9D8B030D-6E8A-4147-A177-3AD203B41FA5}">
-                      <a16:colId xmlns:a16="http://schemas.microsoft.com/office/drawing/2014/main" val="20005"/>
-                    </a:ext>
-                  </a:extLst>
-                </a:gridCol>
+                <a:gridCol w="1371600"/>
+                <a:gridCol w="1371600"/>
+                <a:gridCol w="1371600"/>
+                <a:gridCol w="1371600"/>
+                <a:gridCol w="1371600"/>
+                <a:gridCol w="1371600"/>
               </a:tblGrid>
               <a:tr h="457200">
                 <a:tc>
@@ -6227,7 +5693,6 @@
                         </a:defRPr>
                       </a:pPr>
                       <a:r>
-                        <a:rPr sz="2000"/>
                         <a:t>Year</a:t>
                       </a:r>
                     </a:p>
@@ -6251,7 +5716,6 @@
                         </a:defRPr>
                       </a:pPr>
                       <a:r>
-                        <a:rPr sz="2000"/>
                         <a:t>Maintenance</a:t>
                       </a:r>
                     </a:p>
@@ -6275,7 +5739,6 @@
                         </a:defRPr>
                       </a:pPr>
                       <a:r>
-                        <a:rPr sz="2000"/>
                         <a:t>Extra staff</a:t>
                       </a:r>
                     </a:p>
@@ -6299,7 +5762,6 @@
                         </a:defRPr>
                       </a:pPr>
                       <a:r>
-                        <a:rPr sz="2000"/>
                         <a:t>Rent/overhead</a:t>
                       </a:r>
                     </a:p>
@@ -6323,7 +5785,6 @@
                         </a:defRPr>
                       </a:pPr>
                       <a:r>
-                        <a:rPr sz="2000"/>
                         <a:t>Other</a:t>
                       </a:r>
                     </a:p>
@@ -6347,7 +5808,6 @@
                         </a:defRPr>
                       </a:pPr>
                       <a:r>
-                        <a:rPr sz="2000"/>
                         <a:t>Total fixed</a:t>
                       </a:r>
                     </a:p>
@@ -6358,11 +5818,6 @@
                     </a:solidFill>
                   </a:tcPr>
                 </a:tc>
-                <a:extLst>
-                  <a:ext uri="{0D108BD9-81ED-4DB2-BD59-A6C34878D82A}">
-                    <a16:rowId xmlns:a16="http://schemas.microsoft.com/office/drawing/2014/main" val="10000"/>
-                  </a:ext>
-                </a:extLst>
               </a:tr>
               <a:tr h="457200">
                 <a:tc>
@@ -6374,7 +5829,6 @@
                         <a:defRPr sz="900" b="0"/>
                       </a:pPr>
                       <a:r>
-                        <a:rPr sz="2000"/>
                         <a:t>Year 1</a:t>
                       </a:r>
                     </a:p>
@@ -6394,7 +5848,6 @@
                         <a:defRPr sz="900" b="0"/>
                       </a:pPr>
                       <a:r>
-                        <a:rPr sz="2000"/>
                         <a:t>432,000</a:t>
                       </a:r>
                     </a:p>
@@ -6414,7 +5867,6 @@
                         <a:defRPr sz="900" b="0"/>
                       </a:pPr>
                       <a:r>
-                        <a:rPr sz="2000"/>
                         <a:t>288,000</a:t>
                       </a:r>
                     </a:p>
@@ -6434,7 +5886,6 @@
                         <a:defRPr sz="900" b="0"/>
                       </a:pPr>
                       <a:r>
-                        <a:rPr sz="2000"/>
                         <a:t>96,000</a:t>
                       </a:r>
                     </a:p>
@@ -6454,7 +5905,6 @@
                         <a:defRPr sz="900" b="0"/>
                       </a:pPr>
                       <a:r>
-                        <a:rPr sz="2000"/>
                         <a:t>384,000</a:t>
                       </a:r>
                     </a:p>
@@ -6474,7 +5924,6 @@
                         <a:defRPr sz="900" b="0"/>
                       </a:pPr>
                       <a:r>
-                        <a:rPr sz="2000"/>
                         <a:t>1,200,000</a:t>
                       </a:r>
                     </a:p>
@@ -6485,11 +5934,6 @@
                     </a:solidFill>
                   </a:tcPr>
                 </a:tc>
-                <a:extLst>
-                  <a:ext uri="{0D108BD9-81ED-4DB2-BD59-A6C34878D82A}">
-                    <a16:rowId xmlns:a16="http://schemas.microsoft.com/office/drawing/2014/main" val="10001"/>
-                  </a:ext>
-                </a:extLst>
               </a:tr>
               <a:tr h="457200">
                 <a:tc>
@@ -6501,7 +5945,6 @@
                         <a:defRPr sz="900" b="0"/>
                       </a:pPr>
                       <a:r>
-                        <a:rPr sz="2000"/>
                         <a:t>Year 2</a:t>
                       </a:r>
                     </a:p>
@@ -6521,7 +5964,6 @@
                         <a:defRPr sz="900" b="0"/>
                       </a:pPr>
                       <a:r>
-                        <a:rPr sz="2000"/>
                         <a:t>432,000</a:t>
                       </a:r>
                     </a:p>
@@ -6541,7 +5983,6 @@
                         <a:defRPr sz="900" b="0"/>
                       </a:pPr>
                       <a:r>
-                        <a:rPr sz="2000"/>
                         <a:t>288,000</a:t>
                       </a:r>
                     </a:p>
@@ -6561,7 +6002,6 @@
                         <a:defRPr sz="900" b="0"/>
                       </a:pPr>
                       <a:r>
-                        <a:rPr sz="2000"/>
                         <a:t>96,000</a:t>
                       </a:r>
                     </a:p>
@@ -6581,7 +6021,6 @@
                         <a:defRPr sz="900" b="0"/>
                       </a:pPr>
                       <a:r>
-                        <a:rPr sz="2000"/>
                         <a:t>384,000</a:t>
                       </a:r>
                     </a:p>
@@ -6601,7 +6040,6 @@
                         <a:defRPr sz="900" b="0"/>
                       </a:pPr>
                       <a:r>
-                        <a:rPr sz="2000"/>
                         <a:t>1,200,000</a:t>
                       </a:r>
                     </a:p>
@@ -6612,11 +6050,6 @@
                     </a:solidFill>
                   </a:tcPr>
                 </a:tc>
-                <a:extLst>
-                  <a:ext uri="{0D108BD9-81ED-4DB2-BD59-A6C34878D82A}">
-                    <a16:rowId xmlns:a16="http://schemas.microsoft.com/office/drawing/2014/main" val="10002"/>
-                  </a:ext>
-                </a:extLst>
               </a:tr>
               <a:tr h="457200">
                 <a:tc>
@@ -6628,7 +6061,6 @@
                         <a:defRPr sz="900" b="0"/>
                       </a:pPr>
                       <a:r>
-                        <a:rPr sz="2000"/>
                         <a:t>Year 3</a:t>
                       </a:r>
                     </a:p>
@@ -6648,7 +6080,6 @@
                         <a:defRPr sz="900" b="0"/>
                       </a:pPr>
                       <a:r>
-                        <a:rPr sz="2000"/>
                         <a:t>432,000</a:t>
                       </a:r>
                     </a:p>
@@ -6668,7 +6099,6 @@
                         <a:defRPr sz="900" b="0"/>
                       </a:pPr>
                       <a:r>
-                        <a:rPr sz="2000"/>
                         <a:t>288,000</a:t>
                       </a:r>
                     </a:p>
@@ -6688,7 +6118,6 @@
                         <a:defRPr sz="900" b="0"/>
                       </a:pPr>
                       <a:r>
-                        <a:rPr sz="2000"/>
                         <a:t>96,000</a:t>
                       </a:r>
                     </a:p>
@@ -6708,7 +6137,6 @@
                         <a:defRPr sz="900" b="0"/>
                       </a:pPr>
                       <a:r>
-                        <a:rPr sz="2000"/>
                         <a:t>384,000</a:t>
                       </a:r>
                     </a:p>
@@ -6728,7 +6156,6 @@
                         <a:defRPr sz="900" b="0"/>
                       </a:pPr>
                       <a:r>
-                        <a:rPr sz="2000"/>
                         <a:t>1,200,000</a:t>
                       </a:r>
                     </a:p>
@@ -6739,11 +6166,6 @@
                     </a:solidFill>
                   </a:tcPr>
                 </a:tc>
-                <a:extLst>
-                  <a:ext uri="{0D108BD9-81ED-4DB2-BD59-A6C34878D82A}">
-                    <a16:rowId xmlns:a16="http://schemas.microsoft.com/office/drawing/2014/main" val="10003"/>
-                  </a:ext>
-                </a:extLst>
               </a:tr>
               <a:tr h="457200">
                 <a:tc>
@@ -6755,7 +6177,6 @@
                         <a:defRPr sz="900" b="0"/>
                       </a:pPr>
                       <a:r>
-                        <a:rPr sz="2000"/>
                         <a:t>Year 4</a:t>
                       </a:r>
                     </a:p>
@@ -6775,7 +6196,6 @@
                         <a:defRPr sz="900" b="0"/>
                       </a:pPr>
                       <a:r>
-                        <a:rPr sz="2000"/>
                         <a:t>432,000</a:t>
                       </a:r>
                     </a:p>
@@ -6795,7 +6215,6 @@
                         <a:defRPr sz="900" b="0"/>
                       </a:pPr>
                       <a:r>
-                        <a:rPr sz="2000"/>
                         <a:t>288,000</a:t>
                       </a:r>
                     </a:p>
@@ -6815,7 +6234,6 @@
                         <a:defRPr sz="900" b="0"/>
                       </a:pPr>
                       <a:r>
-                        <a:rPr sz="2000"/>
                         <a:t>96,000</a:t>
                       </a:r>
                     </a:p>
@@ -6835,7 +6253,6 @@
                         <a:defRPr sz="900" b="0"/>
                       </a:pPr>
                       <a:r>
-                        <a:rPr sz="2000"/>
                         <a:t>384,000</a:t>
                       </a:r>
                     </a:p>
@@ -6855,7 +6272,6 @@
                         <a:defRPr sz="900" b="0"/>
                       </a:pPr>
                       <a:r>
-                        <a:rPr sz="2000"/>
                         <a:t>1,200,000</a:t>
                       </a:r>
                     </a:p>
@@ -6866,11 +6282,6 @@
                     </a:solidFill>
                   </a:tcPr>
                 </a:tc>
-                <a:extLst>
-                  <a:ext uri="{0D108BD9-81ED-4DB2-BD59-A6C34878D82A}">
-                    <a16:rowId xmlns:a16="http://schemas.microsoft.com/office/drawing/2014/main" val="10004"/>
-                  </a:ext>
-                </a:extLst>
               </a:tr>
               <a:tr h="457200">
                 <a:tc>
@@ -6882,7 +6293,6 @@
                         <a:defRPr sz="900" b="0"/>
                       </a:pPr>
                       <a:r>
-                        <a:rPr sz="2000"/>
                         <a:t>Year 5</a:t>
                       </a:r>
                     </a:p>
@@ -6902,7 +6312,6 @@
                         <a:defRPr sz="900" b="0"/>
                       </a:pPr>
                       <a:r>
-                        <a:rPr sz="2000"/>
                         <a:t>432,000</a:t>
                       </a:r>
                     </a:p>
@@ -6922,7 +6331,6 @@
                         <a:defRPr sz="900" b="0"/>
                       </a:pPr>
                       <a:r>
-                        <a:rPr sz="2000"/>
                         <a:t>288,000</a:t>
                       </a:r>
                     </a:p>
@@ -6942,7 +6350,6 @@
                         <a:defRPr sz="900" b="0"/>
                       </a:pPr>
                       <a:r>
-                        <a:rPr sz="2000"/>
                         <a:t>96,000</a:t>
                       </a:r>
                     </a:p>
@@ -6962,7 +6369,6 @@
                         <a:defRPr sz="900" b="0"/>
                       </a:pPr>
                       <a:r>
-                        <a:rPr sz="2000"/>
                         <a:t>384,000</a:t>
                       </a:r>
                     </a:p>
@@ -6982,7 +6388,6 @@
                         <a:defRPr sz="900" b="0"/>
                       </a:pPr>
                       <a:r>
-                        <a:rPr sz="2000" dirty="0"/>
                         <a:t>1,200,000</a:t>
                       </a:r>
                     </a:p>
@@ -6993,11 +6398,6 @@
                     </a:solidFill>
                   </a:tcPr>
                 </a:tc>
-                <a:extLst>
-                  <a:ext uri="{0D108BD9-81ED-4DB2-BD59-A6C34878D82A}">
-                    <a16:rowId xmlns:a16="http://schemas.microsoft.com/office/drawing/2014/main" val="10005"/>
-                  </a:ext>
-                </a:extLst>
               </a:tr>
             </a:tbl>
           </a:graphicData>
@@ -7012,7 +6412,7 @@
 </file>
 
 <file path=ppt/slides/slide7.xml><?xml version="1.0" encoding="utf-8"?>
-<p:sld xmlns:a="http://schemas.openxmlformats.org/drawingml/2006/main" xmlns:r="http://schemas.openxmlformats.org/officeDocument/2006/relationships" xmlns:p="http://schemas.openxmlformats.org/presentationml/2006/main">
+<p:sld xmlns:a="http://schemas.openxmlformats.org/drawingml/2006/main" xmlns:p="http://schemas.openxmlformats.org/presentationml/2006/main" xmlns:r="http://schemas.openxmlformats.org/officeDocument/2006/relationships">
   <p:cSld>
     <p:spTree>
       <p:nvGrpSpPr>
@@ -7020,14 +6420,7 @@
         <p:cNvGrpSpPr/>
         <p:nvPr/>
       </p:nvGrpSpPr>
-      <p:grpSpPr>
-        <a:xfrm>
-          <a:off x="0" y="0"/>
-          <a:ext cx="0" cy="0"/>
-          <a:chOff x="0" y="0"/>
-          <a:chExt cx="0" cy="0"/>
-        </a:xfrm>
-      </p:grpSpPr>
+      <p:grpSpPr/>
       <p:sp>
         <p:nvSpPr>
           <p:cNvPr id="2" name="Title 1"/>
@@ -7040,9 +6433,7 @@
         </p:nvSpPr>
         <p:spPr/>
         <p:txBody>
-          <a:bodyPr>
-            <a:normAutofit fontScale="90000"/>
-          </a:bodyPr>
+          <a:bodyPr/>
           <a:lstStyle/>
           <a:p>
             <a:r>
@@ -7057,17 +6448,11 @@
           <p:cNvGraphicFramePr>
             <a:graphicFrameLocks noGrp="1"/>
           </p:cNvGraphicFramePr>
-          <p:nvPr>
-            <p:extLst>
-              <p:ext uri="{D42A27DB-BD31-4B8C-83A1-F6EECF244321}">
-                <p14:modId xmlns:p14="http://schemas.microsoft.com/office/powerpoint/2010/main" val="3529964012"/>
-              </p:ext>
-            </p:extLst>
-          </p:nvPr>
+          <p:nvPr/>
         </p:nvGraphicFramePr>
         <p:xfrm>
-          <a:off x="182880" y="2057400"/>
-          <a:ext cx="8778240" cy="4206240"/>
+          <a:off x="182880" y="1371600"/>
+          <a:ext cx="8778240" cy="2743200"/>
         </p:xfrm>
         <a:graphic>
           <a:graphicData uri="http://schemas.openxmlformats.org/drawingml/2006/table">
@@ -7076,55 +6461,13 @@
                 <a:tableStyleId>{5C22544A-7EE6-4342-B048-85BDC9FD1C3A}</a:tableStyleId>
               </a:tblPr>
               <a:tblGrid>
-                <a:gridCol w="1254034">
-                  <a:extLst>
-                    <a:ext uri="{9D8B030D-6E8A-4147-A177-3AD203B41FA5}">
-                      <a16:colId xmlns:a16="http://schemas.microsoft.com/office/drawing/2014/main" val="20000"/>
-                    </a:ext>
-                  </a:extLst>
-                </a:gridCol>
-                <a:gridCol w="1254034">
-                  <a:extLst>
-                    <a:ext uri="{9D8B030D-6E8A-4147-A177-3AD203B41FA5}">
-                      <a16:colId xmlns:a16="http://schemas.microsoft.com/office/drawing/2014/main" val="20001"/>
-                    </a:ext>
-                  </a:extLst>
-                </a:gridCol>
-                <a:gridCol w="1254034">
-                  <a:extLst>
-                    <a:ext uri="{9D8B030D-6E8A-4147-A177-3AD203B41FA5}">
-                      <a16:colId xmlns:a16="http://schemas.microsoft.com/office/drawing/2014/main" val="20002"/>
-                    </a:ext>
-                  </a:extLst>
-                </a:gridCol>
-                <a:gridCol w="1254034">
-                  <a:extLst>
-                    <a:ext uri="{9D8B030D-6E8A-4147-A177-3AD203B41FA5}">
-                      <a16:colId xmlns:a16="http://schemas.microsoft.com/office/drawing/2014/main" val="20003"/>
-                    </a:ext>
-                  </a:extLst>
-                </a:gridCol>
-                <a:gridCol w="1254034">
-                  <a:extLst>
-                    <a:ext uri="{9D8B030D-6E8A-4147-A177-3AD203B41FA5}">
-                      <a16:colId xmlns:a16="http://schemas.microsoft.com/office/drawing/2014/main" val="20004"/>
-                    </a:ext>
-                  </a:extLst>
-                </a:gridCol>
-                <a:gridCol w="1254034">
-                  <a:extLst>
-                    <a:ext uri="{9D8B030D-6E8A-4147-A177-3AD203B41FA5}">
-                      <a16:colId xmlns:a16="http://schemas.microsoft.com/office/drawing/2014/main" val="20005"/>
-                    </a:ext>
-                  </a:extLst>
-                </a:gridCol>
-                <a:gridCol w="1254036">
-                  <a:extLst>
-                    <a:ext uri="{9D8B030D-6E8A-4147-A177-3AD203B41FA5}">
-                      <a16:colId xmlns:a16="http://schemas.microsoft.com/office/drawing/2014/main" val="20006"/>
-                    </a:ext>
-                  </a:extLst>
-                </a:gridCol>
+                <a:gridCol w="1254034"/>
+                <a:gridCol w="1254034"/>
+                <a:gridCol w="1254034"/>
+                <a:gridCol w="1254034"/>
+                <a:gridCol w="1254034"/>
+                <a:gridCol w="1254034"/>
+                <a:gridCol w="1254036"/>
               </a:tblGrid>
               <a:tr h="457200">
                 <a:tc>
@@ -7140,7 +6483,6 @@
                         </a:defRPr>
                       </a:pPr>
                       <a:r>
-                        <a:rPr sz="2000"/>
                         <a:t>Year</a:t>
                       </a:r>
                     </a:p>
@@ -7164,7 +6506,6 @@
                         </a:defRPr>
                       </a:pPr>
                       <a:r>
-                        <a:rPr sz="2000"/>
                         <a:t>Units</a:t>
                       </a:r>
                     </a:p>
@@ -7188,7 +6529,6 @@
                         </a:defRPr>
                       </a:pPr>
                       <a:r>
-                        <a:rPr sz="2000"/>
                         <a:t>Revenue</a:t>
                       </a:r>
                     </a:p>
@@ -7212,7 +6552,6 @@
                         </a:defRPr>
                       </a:pPr>
                       <a:r>
-                        <a:rPr sz="2000"/>
                         <a:t>Variable costs</a:t>
                       </a:r>
                     </a:p>
@@ -7236,7 +6575,6 @@
                         </a:defRPr>
                       </a:pPr>
                       <a:r>
-                        <a:rPr sz="2000"/>
                         <a:t>Contribution</a:t>
                       </a:r>
                     </a:p>
@@ -7260,7 +6598,6 @@
                         </a:defRPr>
                       </a:pPr>
                       <a:r>
-                        <a:rPr sz="2000"/>
                         <a:t>Fixed costs</a:t>
                       </a:r>
                     </a:p>
@@ -7284,7 +6621,6 @@
                         </a:defRPr>
                       </a:pPr>
                       <a:r>
-                        <a:rPr sz="2000"/>
                         <a:t>EBITDA</a:t>
                       </a:r>
                     </a:p>
@@ -7295,11 +6631,6 @@
                     </a:solidFill>
                   </a:tcPr>
                 </a:tc>
-                <a:extLst>
-                  <a:ext uri="{0D108BD9-81ED-4DB2-BD59-A6C34878D82A}">
-                    <a16:rowId xmlns:a16="http://schemas.microsoft.com/office/drawing/2014/main" val="10000"/>
-                  </a:ext>
-                </a:extLst>
               </a:tr>
               <a:tr h="457200">
                 <a:tc>
@@ -7311,7 +6642,6 @@
                         <a:defRPr sz="900" b="0"/>
                       </a:pPr>
                       <a:r>
-                        <a:rPr sz="2000"/>
                         <a:t>Year 1</a:t>
                       </a:r>
                     </a:p>
@@ -7331,7 +6661,6 @@
                         <a:defRPr sz="900" b="0"/>
                       </a:pPr>
                       <a:r>
-                        <a:rPr sz="2000"/>
                         <a:t>118.8</a:t>
                       </a:r>
                     </a:p>
@@ -7351,7 +6680,6 @@
                         <a:defRPr sz="900" b="0"/>
                       </a:pPr>
                       <a:r>
-                        <a:rPr sz="2000"/>
                         <a:t>14,962,500</a:t>
                       </a:r>
                     </a:p>
@@ -7371,7 +6699,6 @@
                         <a:defRPr sz="900" b="0"/>
                       </a:pPr>
                       <a:r>
-                        <a:rPr sz="2000"/>
                         <a:t>12,237,500</a:t>
                       </a:r>
                     </a:p>
@@ -7391,7 +6718,6 @@
                         <a:defRPr sz="900" b="0"/>
                       </a:pPr>
                       <a:r>
-                        <a:rPr sz="2000"/>
                         <a:t>2,725,000</a:t>
                       </a:r>
                     </a:p>
@@ -7411,7 +6737,6 @@
                         <a:defRPr sz="900" b="0"/>
                       </a:pPr>
                       <a:r>
-                        <a:rPr sz="2000"/>
                         <a:t>1,200,000</a:t>
                       </a:r>
                     </a:p>
@@ -7431,7 +6756,6 @@
                         <a:defRPr sz="900" b="0"/>
                       </a:pPr>
                       <a:r>
-                        <a:rPr sz="2000"/>
                         <a:t>1,525,000</a:t>
                       </a:r>
                     </a:p>
@@ -7442,11 +6766,6 @@
                     </a:solidFill>
                   </a:tcPr>
                 </a:tc>
-                <a:extLst>
-                  <a:ext uri="{0D108BD9-81ED-4DB2-BD59-A6C34878D82A}">
-                    <a16:rowId xmlns:a16="http://schemas.microsoft.com/office/drawing/2014/main" val="10001"/>
-                  </a:ext>
-                </a:extLst>
               </a:tr>
               <a:tr h="457200">
                 <a:tc>
@@ -7458,7 +6777,6 @@
                         <a:defRPr sz="900" b="0"/>
                       </a:pPr>
                       <a:r>
-                        <a:rPr sz="2000"/>
                         <a:t>Year 2</a:t>
                       </a:r>
                     </a:p>
@@ -7478,7 +6796,6 @@
                         <a:defRPr sz="900" b="0"/>
                       </a:pPr>
                       <a:r>
-                        <a:rPr sz="2000"/>
                         <a:t>180.0</a:t>
                       </a:r>
                     </a:p>
@@ -7498,7 +6815,6 @@
                         <a:defRPr sz="900" b="0"/>
                       </a:pPr>
                       <a:r>
-                        <a:rPr sz="2000"/>
                         <a:t>22,226,400</a:t>
                       </a:r>
                     </a:p>
@@ -7518,7 +6834,6 @@
                         <a:defRPr sz="900" b="0"/>
                       </a:pPr>
                       <a:r>
-                        <a:rPr sz="2000"/>
                         <a:t>18,356,250</a:t>
                       </a:r>
                     </a:p>
@@ -7538,7 +6853,6 @@
                         <a:defRPr sz="900" b="0"/>
                       </a:pPr>
                       <a:r>
-                        <a:rPr sz="2000"/>
                         <a:t>3,870,150</a:t>
                       </a:r>
                     </a:p>
@@ -7558,7 +6872,6 @@
                         <a:defRPr sz="900" b="0"/>
                       </a:pPr>
                       <a:r>
-                        <a:rPr sz="2000"/>
                         <a:t>1,200,000</a:t>
                       </a:r>
                     </a:p>
@@ -7578,7 +6891,6 @@
                         <a:defRPr sz="900" b="0"/>
                       </a:pPr>
                       <a:r>
-                        <a:rPr sz="2000"/>
                         <a:t>2,670,150</a:t>
                       </a:r>
                     </a:p>
@@ -7589,11 +6901,6 @@
                     </a:solidFill>
                   </a:tcPr>
                 </a:tc>
-                <a:extLst>
-                  <a:ext uri="{0D108BD9-81ED-4DB2-BD59-A6C34878D82A}">
-                    <a16:rowId xmlns:a16="http://schemas.microsoft.com/office/drawing/2014/main" val="10002"/>
-                  </a:ext>
-                </a:extLst>
               </a:tr>
               <a:tr h="457200">
                 <a:tc>
@@ -7605,7 +6912,6 @@
                         <a:defRPr sz="900" b="0"/>
                       </a:pPr>
                       <a:r>
-                        <a:rPr sz="2000"/>
                         <a:t>Year 3</a:t>
                       </a:r>
                     </a:p>
@@ -7625,7 +6931,6 @@
                         <a:defRPr sz="900" b="0"/>
                       </a:pPr>
                       <a:r>
-                        <a:rPr sz="2000"/>
                         <a:t>218.2</a:t>
                       </a:r>
                     </a:p>
@@ -7645,7 +6950,6 @@
                         <a:defRPr sz="900" b="0"/>
                       </a:pPr>
                       <a:r>
-                        <a:rPr sz="2000"/>
                         <a:t>26,410,520</a:t>
                       </a:r>
                     </a:p>
@@ -7665,7 +6969,6 @@
                         <a:defRPr sz="900" b="0"/>
                       </a:pPr>
                       <a:r>
-                        <a:rPr sz="2000"/>
                         <a:t>22,027,500</a:t>
                       </a:r>
                     </a:p>
@@ -7685,7 +6988,6 @@
                         <a:defRPr sz="900" b="0"/>
                       </a:pPr>
                       <a:r>
-                        <a:rPr sz="2000"/>
                         <a:t>4,383,020</a:t>
                       </a:r>
                     </a:p>
@@ -7705,7 +7007,6 @@
                         <a:defRPr sz="900" b="0"/>
                       </a:pPr>
                       <a:r>
-                        <a:rPr sz="2000"/>
                         <a:t>1,200,000</a:t>
                       </a:r>
                     </a:p>
@@ -7725,7 +7026,6 @@
                         <a:defRPr sz="900" b="0"/>
                       </a:pPr>
                       <a:r>
-                        <a:rPr sz="2000"/>
                         <a:t>3,183,020</a:t>
                       </a:r>
                     </a:p>
@@ -7736,11 +7036,6 @@
                     </a:solidFill>
                   </a:tcPr>
                 </a:tc>
-                <a:extLst>
-                  <a:ext uri="{0D108BD9-81ED-4DB2-BD59-A6C34878D82A}">
-                    <a16:rowId xmlns:a16="http://schemas.microsoft.com/office/drawing/2014/main" val="10003"/>
-                  </a:ext>
-                </a:extLst>
               </a:tr>
               <a:tr h="457200">
                 <a:tc>
@@ -7752,7 +7047,6 @@
                         <a:defRPr sz="900" b="0"/>
                       </a:pPr>
                       <a:r>
-                        <a:rPr sz="2000"/>
                         <a:t>Year 4</a:t>
                       </a:r>
                     </a:p>
@@ -7772,7 +7066,6 @@
                         <a:defRPr sz="900" b="0"/>
                       </a:pPr>
                       <a:r>
-                        <a:rPr sz="2000"/>
                         <a:t>232.8</a:t>
                       </a:r>
                     </a:p>
@@ -7792,7 +7085,6 @@
                         <a:defRPr sz="900" b="0"/>
                       </a:pPr>
                       <a:r>
-                        <a:rPr sz="2000"/>
                         <a:t>27,601,867</a:t>
                       </a:r>
                     </a:p>
@@ -7812,7 +7104,6 @@
                         <a:defRPr sz="900" b="0"/>
                       </a:pPr>
                       <a:r>
-                        <a:rPr sz="2000"/>
                         <a:t>23,251,250</a:t>
                       </a:r>
                     </a:p>
@@ -7832,7 +7123,6 @@
                         <a:defRPr sz="900" b="0"/>
                       </a:pPr>
                       <a:r>
-                        <a:rPr sz="2000"/>
                         <a:t>4,350,617</a:t>
                       </a:r>
                     </a:p>
@@ -7852,7 +7142,6 @@
                         <a:defRPr sz="900" b="0"/>
                       </a:pPr>
                       <a:r>
-                        <a:rPr sz="2000"/>
                         <a:t>1,200,000</a:t>
                       </a:r>
                     </a:p>
@@ -7872,7 +7161,6 @@
                         <a:defRPr sz="900" b="0"/>
                       </a:pPr>
                       <a:r>
-                        <a:rPr sz="2000"/>
                         <a:t>3,150,617</a:t>
                       </a:r>
                     </a:p>
@@ -7883,11 +7171,6 @@
                     </a:solidFill>
                   </a:tcPr>
                 </a:tc>
-                <a:extLst>
-                  <a:ext uri="{0D108BD9-81ED-4DB2-BD59-A6C34878D82A}">
-                    <a16:rowId xmlns:a16="http://schemas.microsoft.com/office/drawing/2014/main" val="10004"/>
-                  </a:ext>
-                </a:extLst>
               </a:tr>
               <a:tr h="457200">
                 <a:tc>
@@ -7899,7 +7182,6 @@
                         <a:defRPr sz="900" b="0"/>
                       </a:pPr>
                       <a:r>
-                        <a:rPr sz="2000"/>
                         <a:t>Year 5</a:t>
                       </a:r>
                     </a:p>
@@ -7919,7 +7201,6 @@
                         <a:defRPr sz="900" b="0"/>
                       </a:pPr>
                       <a:r>
-                        <a:rPr sz="2000"/>
                         <a:t>245.0</a:t>
                       </a:r>
                     </a:p>
@@ -7939,7 +7220,6 @@
                         <a:defRPr sz="900" b="0"/>
                       </a:pPr>
                       <a:r>
-                        <a:rPr sz="2000"/>
                         <a:t>28,473,505</a:t>
                       </a:r>
                     </a:p>
@@ -7959,7 +7239,6 @@
                         <a:defRPr sz="900" b="0"/>
                       </a:pPr>
                       <a:r>
-                        <a:rPr sz="2000"/>
                         <a:t>24,475,000</a:t>
                       </a:r>
                     </a:p>
@@ -7979,7 +7258,6 @@
                         <a:defRPr sz="900" b="0"/>
                       </a:pPr>
                       <a:r>
-                        <a:rPr sz="2000"/>
                         <a:t>3,998,505</a:t>
                       </a:r>
                     </a:p>
@@ -7999,7 +7277,6 @@
                         <a:defRPr sz="900" b="0"/>
                       </a:pPr>
                       <a:r>
-                        <a:rPr sz="2000"/>
                         <a:t>1,200,000</a:t>
                       </a:r>
                     </a:p>
@@ -8019,7 +7296,6 @@
                         <a:defRPr sz="900" b="0"/>
                       </a:pPr>
                       <a:r>
-                        <a:rPr sz="2000" dirty="0"/>
                         <a:t>2,798,505</a:t>
                       </a:r>
                     </a:p>
@@ -8030,11 +7306,6 @@
                     </a:solidFill>
                   </a:tcPr>
                 </a:tc>
-                <a:extLst>
-                  <a:ext uri="{0D108BD9-81ED-4DB2-BD59-A6C34878D82A}">
-                    <a16:rowId xmlns:a16="http://schemas.microsoft.com/office/drawing/2014/main" val="10005"/>
-                  </a:ext>
-                </a:extLst>
               </a:tr>
             </a:tbl>
           </a:graphicData>
@@ -8049,7 +7320,7 @@
 </file>
 
 <file path=ppt/slides/slide8.xml><?xml version="1.0" encoding="utf-8"?>
-<p:sld xmlns:a="http://schemas.openxmlformats.org/drawingml/2006/main" xmlns:r="http://schemas.openxmlformats.org/officeDocument/2006/relationships" xmlns:p="http://schemas.openxmlformats.org/presentationml/2006/main">
+<p:sld xmlns:a="http://schemas.openxmlformats.org/drawingml/2006/main" xmlns:p="http://schemas.openxmlformats.org/presentationml/2006/main" xmlns:r="http://schemas.openxmlformats.org/officeDocument/2006/relationships">
   <p:cSld>
     <p:spTree>
       <p:nvGrpSpPr>
@@ -8057,14 +7328,7 @@
         <p:cNvGrpSpPr/>
         <p:nvPr/>
       </p:nvGrpSpPr>
-      <p:grpSpPr>
-        <a:xfrm>
-          <a:off x="0" y="0"/>
-          <a:ext cx="0" cy="0"/>
-          <a:chOff x="0" y="0"/>
-          <a:chExt cx="0" cy="0"/>
-        </a:xfrm>
-      </p:grpSpPr>
+      <p:grpSpPr/>
       <p:sp>
         <p:nvSpPr>
           <p:cNvPr id="2" name="Title 1"/>
@@ -8092,13 +7356,7 @@
           <p:cNvGraphicFramePr>
             <a:graphicFrameLocks noGrp="1"/>
           </p:cNvGraphicFramePr>
-          <p:nvPr>
-            <p:extLst>
-              <p:ext uri="{D42A27DB-BD31-4B8C-83A1-F6EECF244321}">
-                <p14:modId xmlns:p14="http://schemas.microsoft.com/office/powerpoint/2010/main" val="1729377911"/>
-              </p:ext>
-            </p:extLst>
-          </p:nvPr>
+          <p:nvPr/>
         </p:nvGraphicFramePr>
         <p:xfrm>
           <a:off x="457200" y="1371600"/>
@@ -8111,27 +7369,9 @@
                 <a:tableStyleId>{5C22544A-7EE6-4342-B048-85BDC9FD1C3A}</a:tableStyleId>
               </a:tblPr>
               <a:tblGrid>
-                <a:gridCol w="2743200">
-                  <a:extLst>
-                    <a:ext uri="{9D8B030D-6E8A-4147-A177-3AD203B41FA5}">
-                      <a16:colId xmlns:a16="http://schemas.microsoft.com/office/drawing/2014/main" val="20000"/>
-                    </a:ext>
-                  </a:extLst>
-                </a:gridCol>
-                <a:gridCol w="2743200">
-                  <a:extLst>
-                    <a:ext uri="{9D8B030D-6E8A-4147-A177-3AD203B41FA5}">
-                      <a16:colId xmlns:a16="http://schemas.microsoft.com/office/drawing/2014/main" val="20001"/>
-                    </a:ext>
-                  </a:extLst>
-                </a:gridCol>
-                <a:gridCol w="2743200">
-                  <a:extLst>
-                    <a:ext uri="{9D8B030D-6E8A-4147-A177-3AD203B41FA5}">
-                      <a16:colId xmlns:a16="http://schemas.microsoft.com/office/drawing/2014/main" val="20002"/>
-                    </a:ext>
-                  </a:extLst>
-                </a:gridCol>
+                <a:gridCol w="2743200"/>
+                <a:gridCol w="2743200"/>
+                <a:gridCol w="2743200"/>
               </a:tblGrid>
               <a:tr h="457200">
                 <a:tc>
@@ -8147,7 +7387,6 @@
                         </a:defRPr>
                       </a:pPr>
                       <a:r>
-                        <a:rPr sz="2000"/>
                         <a:t>Item</a:t>
                       </a:r>
                     </a:p>
@@ -8171,7 +7410,6 @@
                         </a:defRPr>
                       </a:pPr>
                       <a:r>
-                        <a:rPr sz="2000"/>
                         <a:t>Value</a:t>
                       </a:r>
                     </a:p>
@@ -8195,7 +7433,6 @@
                         </a:defRPr>
                       </a:pPr>
                       <a:r>
-                        <a:rPr sz="2000"/>
                         <a:t>Notes</a:t>
                       </a:r>
                     </a:p>
@@ -8206,11 +7443,6 @@
                     </a:solidFill>
                   </a:tcPr>
                 </a:tc>
-                <a:extLst>
-                  <a:ext uri="{0D108BD9-81ED-4DB2-BD59-A6C34878D82A}">
-                    <a16:rowId xmlns:a16="http://schemas.microsoft.com/office/drawing/2014/main" val="10000"/>
-                  </a:ext>
-                </a:extLst>
               </a:tr>
               <a:tr h="457200">
                 <a:tc>
@@ -8222,7 +7454,6 @@
                         <a:defRPr sz="900" b="0"/>
                       </a:pPr>
                       <a:r>
-                        <a:rPr sz="2000"/>
                         <a:t>Price (EUR/unit)</a:t>
                       </a:r>
                     </a:p>
@@ -8242,7 +7473,6 @@
                         <a:defRPr sz="900" b="0"/>
                       </a:pPr>
                       <a:r>
-                        <a:rPr sz="2000"/>
                         <a:t>116,218</a:t>
                       </a:r>
                     </a:p>
@@ -8262,7 +7492,6 @@
                         <a:defRPr sz="900" b="0"/>
                       </a:pPr>
                       <a:r>
-                        <a:rPr sz="2000"/>
                         <a:t>EUR/MW</a:t>
                       </a:r>
                     </a:p>
@@ -8273,11 +7502,6 @@
                     </a:solidFill>
                   </a:tcPr>
                 </a:tc>
-                <a:extLst>
-                  <a:ext uri="{0D108BD9-81ED-4DB2-BD59-A6C34878D82A}">
-                    <a16:rowId xmlns:a16="http://schemas.microsoft.com/office/drawing/2014/main" val="10001"/>
-                  </a:ext>
-                </a:extLst>
               </a:tr>
               <a:tr h="457200">
                 <a:tc>
@@ -8289,7 +7513,6 @@
                         <a:defRPr sz="900" b="0"/>
                       </a:pPr>
                       <a:r>
-                        <a:rPr sz="2000"/>
                         <a:t>Variable cost (EUR/unit)</a:t>
                       </a:r>
                     </a:p>
@@ -8309,7 +7532,6 @@
                         <a:defRPr sz="900" b="0"/>
                       </a:pPr>
                       <a:r>
-                        <a:rPr sz="2000"/>
                         <a:t>99,898</a:t>
                       </a:r>
                     </a:p>
@@ -8329,7 +7551,6 @@
                         <a:defRPr sz="900" b="0"/>
                       </a:pPr>
                       <a:r>
-                        <a:rPr sz="2000"/>
                         <a:t>EUR/MW</a:t>
                       </a:r>
                     </a:p>
@@ -8340,11 +7561,6 @@
                     </a:solidFill>
                   </a:tcPr>
                 </a:tc>
-                <a:extLst>
-                  <a:ext uri="{0D108BD9-81ED-4DB2-BD59-A6C34878D82A}">
-                    <a16:rowId xmlns:a16="http://schemas.microsoft.com/office/drawing/2014/main" val="10002"/>
-                  </a:ext>
-                </a:extLst>
               </a:tr>
               <a:tr h="457200">
                 <a:tc>
@@ -8356,7 +7572,6 @@
                         <a:defRPr sz="900" b="0"/>
                       </a:pPr>
                       <a:r>
-                        <a:rPr sz="2000"/>
                         <a:t>Contribution (EUR/unit)</a:t>
                       </a:r>
                     </a:p>
@@ -8376,7 +7591,6 @@
                         <a:defRPr sz="900" b="0"/>
                       </a:pPr>
                       <a:r>
-                        <a:rPr sz="2000"/>
                         <a:t>16,320</a:t>
                       </a:r>
                     </a:p>
@@ -8396,7 +7610,6 @@
                         <a:defRPr sz="900" b="0"/>
                       </a:pPr>
                       <a:r>
-                        <a:rPr sz="2000"/>
                         <a:t>Price - Var cost</a:t>
                       </a:r>
                     </a:p>
@@ -8407,11 +7620,6 @@
                     </a:solidFill>
                   </a:tcPr>
                 </a:tc>
-                <a:extLst>
-                  <a:ext uri="{0D108BD9-81ED-4DB2-BD59-A6C34878D82A}">
-                    <a16:rowId xmlns:a16="http://schemas.microsoft.com/office/drawing/2014/main" val="10003"/>
-                  </a:ext>
-                </a:extLst>
               </a:tr>
               <a:tr h="457200">
                 <a:tc>
@@ -8423,7 +7631,6 @@
                         <a:defRPr sz="900" b="0"/>
                       </a:pPr>
                       <a:r>
-                        <a:rPr sz="2000"/>
                         <a:t>Fixed costs (EUR/period)</a:t>
                       </a:r>
                     </a:p>
@@ -8443,7 +7650,6 @@
                         <a:defRPr sz="900" b="0"/>
                       </a:pPr>
                       <a:r>
-                        <a:rPr sz="2000"/>
                         <a:t>1,200,000</a:t>
                       </a:r>
                     </a:p>
@@ -8463,7 +7669,6 @@
                         <a:defRPr sz="900" b="0"/>
                       </a:pPr>
                       <a:r>
-                        <a:rPr sz="2000"/>
                         <a:t>Annual burden</a:t>
                       </a:r>
                     </a:p>
@@ -8474,11 +7679,6 @@
                     </a:solidFill>
                   </a:tcPr>
                 </a:tc>
-                <a:extLst>
-                  <a:ext uri="{0D108BD9-81ED-4DB2-BD59-A6C34878D82A}">
-                    <a16:rowId xmlns:a16="http://schemas.microsoft.com/office/drawing/2014/main" val="10004"/>
-                  </a:ext>
-                </a:extLst>
               </a:tr>
               <a:tr h="457200">
                 <a:tc>
@@ -8490,7 +7690,6 @@
                         <a:defRPr sz="900" b="0"/>
                       </a:pPr>
                       <a:r>
-                        <a:rPr sz="2000"/>
                         <a:t>Break-even units (Q_BE)</a:t>
                       </a:r>
                     </a:p>
@@ -8510,7 +7709,6 @@
                         <a:defRPr sz="900" b="0"/>
                       </a:pPr>
                       <a:r>
-                        <a:rPr sz="2000"/>
                         <a:t>73.53</a:t>
                       </a:r>
                     </a:p>
@@ -8530,7 +7728,6 @@
                         <a:defRPr sz="900" b="0"/>
                       </a:pPr>
                       <a:r>
-                        <a:rPr sz="2000"/>
                         <a:t>Fixed / Contrib unit</a:t>
                       </a:r>
                     </a:p>
@@ -8541,11 +7738,6 @@
                     </a:solidFill>
                   </a:tcPr>
                 </a:tc>
-                <a:extLst>
-                  <a:ext uri="{0D108BD9-81ED-4DB2-BD59-A6C34878D82A}">
-                    <a16:rowId xmlns:a16="http://schemas.microsoft.com/office/drawing/2014/main" val="10005"/>
-                  </a:ext>
-                </a:extLst>
               </a:tr>
               <a:tr h="457200">
                 <a:tc>
@@ -8557,7 +7749,6 @@
                         <a:defRPr sz="900" b="0"/>
                       </a:pPr>
                       <a:r>
-                        <a:rPr sz="2000"/>
                         <a:t>Break-even revenue</a:t>
                       </a:r>
                     </a:p>
@@ -8577,7 +7768,6 @@
                         <a:defRPr sz="900" b="0"/>
                       </a:pPr>
                       <a:r>
-                        <a:rPr sz="2000"/>
                         <a:t>8,545,245</a:t>
                       </a:r>
                     </a:p>
@@ -8597,7 +7787,6 @@
                         <a:defRPr sz="900" b="0"/>
                       </a:pPr>
                       <a:r>
-                        <a:rPr sz="2000"/>
                         <a:t>Q_BE x Price</a:t>
                       </a:r>
                     </a:p>
@@ -8608,11 +7797,6 @@
                     </a:solidFill>
                   </a:tcPr>
                 </a:tc>
-                <a:extLst>
-                  <a:ext uri="{0D108BD9-81ED-4DB2-BD59-A6C34878D82A}">
-                    <a16:rowId xmlns:a16="http://schemas.microsoft.com/office/drawing/2014/main" val="10006"/>
-                  </a:ext>
-                </a:extLst>
               </a:tr>
               <a:tr h="457200">
                 <a:tc>
@@ -8624,7 +7808,6 @@
                         <a:defRPr sz="900" b="0"/>
                       </a:pPr>
                       <a:r>
-                        <a:rPr sz="2000"/>
                         <a:t>Margin of safety</a:t>
                       </a:r>
                     </a:p>
@@ -8644,7 +7827,6 @@
                         <a:defRPr sz="900" b="0"/>
                       </a:pPr>
                       <a:r>
-                        <a:rPr sz="2000"/>
                         <a:t>70.0%</a:t>
                       </a:r>
                     </a:p>
@@ -8664,7 +7846,6 @@
                         <a:defRPr sz="900" b="0"/>
                       </a:pPr>
                       <a:r>
-                        <a:rPr sz="2000" dirty="0"/>
                         <a:t>(Exp - Q_BE)/Exp</a:t>
                       </a:r>
                     </a:p>
@@ -8675,11 +7856,6 @@
                     </a:solidFill>
                   </a:tcPr>
                 </a:tc>
-                <a:extLst>
-                  <a:ext uri="{0D108BD9-81ED-4DB2-BD59-A6C34878D82A}">
-                    <a16:rowId xmlns:a16="http://schemas.microsoft.com/office/drawing/2014/main" val="10007"/>
-                  </a:ext>
-                </a:extLst>
               </a:tr>
             </a:tbl>
           </a:graphicData>
@@ -8694,7 +7870,7 @@
 </file>
 
 <file path=ppt/slides/slide9.xml><?xml version="1.0" encoding="utf-8"?>
-<p:sld xmlns:a="http://schemas.openxmlformats.org/drawingml/2006/main" xmlns:r="http://schemas.openxmlformats.org/officeDocument/2006/relationships" xmlns:p="http://schemas.openxmlformats.org/presentationml/2006/main">
+<p:sld xmlns:a="http://schemas.openxmlformats.org/drawingml/2006/main" xmlns:p="http://schemas.openxmlformats.org/presentationml/2006/main" xmlns:r="http://schemas.openxmlformats.org/officeDocument/2006/relationships">
   <p:cSld>
     <p:spTree>
       <p:nvGrpSpPr>
@@ -8702,14 +7878,7 @@
         <p:cNvGrpSpPr/>
         <p:nvPr/>
       </p:nvGrpSpPr>
-      <p:grpSpPr>
-        <a:xfrm>
-          <a:off x="0" y="0"/>
-          <a:ext cx="0" cy="0"/>
-          <a:chOff x="0" y="0"/>
-          <a:chExt cx="0" cy="0"/>
-        </a:xfrm>
-      </p:grpSpPr>
+      <p:grpSpPr/>
       <p:sp>
         <p:nvSpPr>
           <p:cNvPr id="2" name="Title 1"/>
@@ -8720,20 +7889,12 @@
             <p:ph type="title"/>
           </p:nvPr>
         </p:nvSpPr>
-        <p:spPr>
-          <a:xfrm>
-            <a:off x="0" y="91440"/>
-            <a:ext cx="9144000" cy="1143000"/>
-          </a:xfrm>
-        </p:spPr>
+        <p:spPr/>
         <p:txBody>
-          <a:bodyPr>
-            <a:normAutofit fontScale="90000"/>
-          </a:bodyPr>
+          <a:bodyPr/>
           <a:lstStyle/>
           <a:p>
             <a:r>
-              <a:rPr dirty="0"/>
               <a:t>TABLE TEMPLATE 7 — Assumptions &amp; Sources</a:t>
             </a:r>
           </a:p>
@@ -8745,17 +7906,11 @@
           <p:cNvGraphicFramePr>
             <a:graphicFrameLocks noGrp="1"/>
           </p:cNvGraphicFramePr>
-          <p:nvPr>
-            <p:extLst>
-              <p:ext uri="{D42A27DB-BD31-4B8C-83A1-F6EECF244321}">
-                <p14:modId xmlns:p14="http://schemas.microsoft.com/office/powerpoint/2010/main" val="2643590707"/>
-              </p:ext>
-            </p:extLst>
-          </p:nvPr>
+          <p:nvPr/>
         </p:nvGraphicFramePr>
         <p:xfrm>
           <a:off x="182880" y="1371600"/>
-          <a:ext cx="8778240" cy="5394960"/>
+          <a:ext cx="8778240" cy="3657600"/>
         </p:xfrm>
         <a:graphic>
           <a:graphicData uri="http://schemas.openxmlformats.org/drawingml/2006/table">
@@ -8764,48 +7919,12 @@
                 <a:tableStyleId>{5C22544A-7EE6-4342-B048-85BDC9FD1C3A}</a:tableStyleId>
               </a:tblPr>
               <a:tblGrid>
-                <a:gridCol w="1463040">
-                  <a:extLst>
-                    <a:ext uri="{9D8B030D-6E8A-4147-A177-3AD203B41FA5}">
-                      <a16:colId xmlns:a16="http://schemas.microsoft.com/office/drawing/2014/main" val="20000"/>
-                    </a:ext>
-                  </a:extLst>
-                </a:gridCol>
-                <a:gridCol w="1463040">
-                  <a:extLst>
-                    <a:ext uri="{9D8B030D-6E8A-4147-A177-3AD203B41FA5}">
-                      <a16:colId xmlns:a16="http://schemas.microsoft.com/office/drawing/2014/main" val="20001"/>
-                    </a:ext>
-                  </a:extLst>
-                </a:gridCol>
-                <a:gridCol w="1463040">
-                  <a:extLst>
-                    <a:ext uri="{9D8B030D-6E8A-4147-A177-3AD203B41FA5}">
-                      <a16:colId xmlns:a16="http://schemas.microsoft.com/office/drawing/2014/main" val="20002"/>
-                    </a:ext>
-                  </a:extLst>
-                </a:gridCol>
-                <a:gridCol w="1463040">
-                  <a:extLst>
-                    <a:ext uri="{9D8B030D-6E8A-4147-A177-3AD203B41FA5}">
-                      <a16:colId xmlns:a16="http://schemas.microsoft.com/office/drawing/2014/main" val="20003"/>
-                    </a:ext>
-                  </a:extLst>
-                </a:gridCol>
-                <a:gridCol w="1463040">
-                  <a:extLst>
-                    <a:ext uri="{9D8B030D-6E8A-4147-A177-3AD203B41FA5}">
-                      <a16:colId xmlns:a16="http://schemas.microsoft.com/office/drawing/2014/main" val="20004"/>
-                    </a:ext>
-                  </a:extLst>
-                </a:gridCol>
-                <a:gridCol w="1463040">
-                  <a:extLst>
-                    <a:ext uri="{9D8B030D-6E8A-4147-A177-3AD203B41FA5}">
-                      <a16:colId xmlns:a16="http://schemas.microsoft.com/office/drawing/2014/main" val="20005"/>
-                    </a:ext>
-                  </a:extLst>
-                </a:gridCol>
+                <a:gridCol w="1463040"/>
+                <a:gridCol w="1463040"/>
+                <a:gridCol w="1463040"/>
+                <a:gridCol w="1463040"/>
+                <a:gridCol w="1463040"/>
+                <a:gridCol w="1463040"/>
               </a:tblGrid>
               <a:tr h="457200">
                 <a:tc>
@@ -8821,7 +7940,6 @@
                         </a:defRPr>
                       </a:pPr>
                       <a:r>
-                        <a:rPr sz="1800"/>
                         <a:t>Assumption</a:t>
                       </a:r>
                     </a:p>
@@ -8845,7 +7963,6 @@
                         </a:defRPr>
                       </a:pPr>
                       <a:r>
-                        <a:rPr sz="1800"/>
                         <a:t>Value</a:t>
                       </a:r>
                     </a:p>
@@ -8869,7 +7986,6 @@
                         </a:defRPr>
                       </a:pPr>
                       <a:r>
-                        <a:rPr sz="1800"/>
                         <a:t>Unit</a:t>
                       </a:r>
                     </a:p>
@@ -8893,7 +8009,6 @@
                         </a:defRPr>
                       </a:pPr>
                       <a:r>
-                        <a:rPr sz="1800"/>
                         <a:t>Source</a:t>
                       </a:r>
                     </a:p>
@@ -8917,7 +8032,6 @@
                         </a:defRPr>
                       </a:pPr>
                       <a:r>
-                        <a:rPr sz="1800"/>
                         <a:t>Why reasonable</a:t>
                       </a:r>
                     </a:p>
@@ -8941,7 +8055,6 @@
                         </a:defRPr>
                       </a:pPr>
                       <a:r>
-                        <a:rPr sz="1800"/>
                         <a:t>Low/Base/High</a:t>
                       </a:r>
                     </a:p>
@@ -8952,11 +8065,6 @@
                     </a:solidFill>
                   </a:tcPr>
                 </a:tc>
-                <a:extLst>
-                  <a:ext uri="{0D108BD9-81ED-4DB2-BD59-A6C34878D82A}">
-                    <a16:rowId xmlns:a16="http://schemas.microsoft.com/office/drawing/2014/main" val="10000"/>
-                  </a:ext>
-                </a:extLst>
               </a:tr>
               <a:tr h="457200">
                 <a:tc>
@@ -8968,7 +8076,6 @@
                         <a:defRPr sz="900" b="0"/>
                       </a:pPr>
                       <a:r>
-                        <a:rPr sz="1800"/>
                         <a:t>Price</a:t>
                       </a:r>
                     </a:p>
@@ -8988,7 +8095,6 @@
                         <a:defRPr sz="900" b="0"/>
                       </a:pPr>
                       <a:r>
-                        <a:rPr sz="1800"/>
                         <a:t>126,000</a:t>
                       </a:r>
                     </a:p>
@@ -9008,7 +8114,6 @@
                         <a:defRPr sz="900" b="0"/>
                       </a:pPr>
                       <a:r>
-                        <a:rPr sz="1800"/>
                         <a:t>EUR/MW</a:t>
                       </a:r>
                     </a:p>
@@ -9028,7 +8133,6 @@
                         <a:defRPr sz="900" b="0"/>
                       </a:pPr>
                       <a:r>
-                        <a:rPr sz="1800"/>
                         <a:t>LONGi 2025</a:t>
                       </a:r>
                     </a:p>
@@ -9048,7 +8152,6 @@
                         <a:defRPr sz="900" b="0"/>
                       </a:pPr>
                       <a:r>
-                        <a:rPr sz="1800"/>
                         <a:t>HPBC 2.0 premium</a:t>
                       </a:r>
                     </a:p>
@@ -9068,7 +8171,6 @@
                         <a:defRPr sz="900" b="0"/>
                       </a:pPr>
                       <a:r>
-                        <a:rPr sz="1800"/>
                         <a:t>Base</a:t>
                       </a:r>
                     </a:p>
@@ -9079,11 +8181,6 @@
                     </a:solidFill>
                   </a:tcPr>
                 </a:tc>
-                <a:extLst>
-                  <a:ext uri="{0D108BD9-81ED-4DB2-BD59-A6C34878D82A}">
-                    <a16:rowId xmlns:a16="http://schemas.microsoft.com/office/drawing/2014/main" val="10001"/>
-                  </a:ext>
-                </a:extLst>
               </a:tr>
               <a:tr h="457200">
                 <a:tc>
@@ -9095,7 +8192,6 @@
                         <a:defRPr sz="900" b="0"/>
                       </a:pPr>
                       <a:r>
-                        <a:rPr sz="1800"/>
                         <a:t>Volume / demand</a:t>
                       </a:r>
                     </a:p>
@@ -9115,7 +8211,6 @@
                         <a:defRPr sz="900" b="0"/>
                       </a:pPr>
                       <a:r>
-                        <a:rPr sz="1800"/>
                         <a:t>250</a:t>
                       </a:r>
                     </a:p>
@@ -9135,7 +8230,6 @@
                         <a:defRPr sz="900" b="0"/>
                       </a:pPr>
                       <a:r>
-                        <a:rPr sz="1800"/>
                         <a:t>MW</a:t>
                       </a:r>
                     </a:p>
@@ -9155,7 +8249,6 @@
                         <a:defRPr sz="900" b="0"/>
                       </a:pPr>
                       <a:r>
-                        <a:rPr sz="1800"/>
                         <a:t>Market study</a:t>
                       </a:r>
                     </a:p>
@@ -9175,7 +8268,6 @@
                         <a:defRPr sz="900" b="0"/>
                       </a:pPr>
                       <a:r>
-                        <a:rPr sz="1800"/>
                         <a:t>Realistic domestic share</a:t>
                       </a:r>
                     </a:p>
@@ -9195,7 +8287,6 @@
                         <a:defRPr sz="900" b="0"/>
                       </a:pPr>
                       <a:r>
-                        <a:rPr sz="1800"/>
                         <a:t>Base</a:t>
                       </a:r>
                     </a:p>
@@ -9206,11 +8297,6 @@
                     </a:solidFill>
                   </a:tcPr>
                 </a:tc>
-                <a:extLst>
-                  <a:ext uri="{0D108BD9-81ED-4DB2-BD59-A6C34878D82A}">
-                    <a16:rowId xmlns:a16="http://schemas.microsoft.com/office/drawing/2014/main" val="10002"/>
-                  </a:ext>
-                </a:extLst>
               </a:tr>
               <a:tr h="457200">
                 <a:tc>
@@ -9222,7 +8308,6 @@
                         <a:defRPr sz="900" b="0"/>
                       </a:pPr>
                       <a:r>
-                        <a:rPr sz="1800"/>
                         <a:t>Ramp-up (utilization)</a:t>
                       </a:r>
                     </a:p>
@@ -9242,7 +8327,6 @@
                         <a:defRPr sz="900" b="0"/>
                       </a:pPr>
                       <a:r>
-                        <a:rPr sz="1800"/>
                         <a:t>50%-100%</a:t>
                       </a:r>
                     </a:p>
@@ -9262,7 +8346,6 @@
                         <a:defRPr sz="900" b="0"/>
                       </a:pPr>
                       <a:r>
-                        <a:rPr sz="1800"/>
                         <a:t>%</a:t>
                       </a:r>
                     </a:p>
@@ -9282,7 +8365,6 @@
                         <a:defRPr sz="900" b="0"/>
                       </a:pPr>
                       <a:r>
-                        <a:rPr sz="1800"/>
                         <a:t>Project plan</a:t>
                       </a:r>
                     </a:p>
@@ -9302,7 +8384,6 @@
                         <a:defRPr sz="900" b="0"/>
                       </a:pPr>
                       <a:r>
-                        <a:rPr sz="1800"/>
                         <a:t>Staged growth</a:t>
                       </a:r>
                     </a:p>
@@ -9322,7 +8403,6 @@
                         <a:defRPr sz="900" b="0"/>
                       </a:pPr>
                       <a:r>
-                        <a:rPr sz="1800"/>
                         <a:t>Base</a:t>
                       </a:r>
                     </a:p>
@@ -9333,11 +8413,6 @@
                     </a:solidFill>
                   </a:tcPr>
                 </a:tc>
-                <a:extLst>
-                  <a:ext uri="{0D108BD9-81ED-4DB2-BD59-A6C34878D82A}">
-                    <a16:rowId xmlns:a16="http://schemas.microsoft.com/office/drawing/2014/main" val="10003"/>
-                  </a:ext>
-                </a:extLst>
               </a:tr>
               <a:tr h="457200">
                 <a:tc>
@@ -9349,7 +8424,6 @@
                         <a:defRPr sz="900" b="0"/>
                       </a:pPr>
                       <a:r>
-                        <a:rPr sz="1800"/>
                         <a:t>Wage rate</a:t>
                       </a:r>
                     </a:p>
@@ -9369,7 +8443,6 @@
                         <a:defRPr sz="900" b="0"/>
                       </a:pPr>
                       <a:r>
-                        <a:rPr sz="1800"/>
                         <a:t>16.50</a:t>
                       </a:r>
                     </a:p>
@@ -9389,7 +8462,6 @@
                         <a:defRPr sz="900" b="0"/>
                       </a:pPr>
                       <a:r>
-                        <a:rPr sz="1800"/>
                         <a:t>EUR/h</a:t>
                       </a:r>
                     </a:p>
@@ -9409,7 +8481,6 @@
                         <a:defRPr sz="900" b="0"/>
                       </a:pPr>
                       <a:r>
-                        <a:rPr sz="1800"/>
                         <a:t>VDI 2026</a:t>
                       </a:r>
                     </a:p>
@@ -9429,7 +8500,6 @@
                         <a:defRPr sz="900" b="0"/>
                       </a:pPr>
                       <a:r>
-                        <a:rPr sz="1800"/>
                         <a:t>Lithuanian standard</a:t>
                       </a:r>
                     </a:p>
@@ -9449,7 +8519,6 @@
                         <a:defRPr sz="900" b="0"/>
                       </a:pPr>
                       <a:r>
-                        <a:rPr sz="1800"/>
                         <a:t>Base</a:t>
                       </a:r>
                     </a:p>
@@ -9460,11 +8529,6 @@
                     </a:solidFill>
                   </a:tcPr>
                 </a:tc>
-                <a:extLst>
-                  <a:ext uri="{0D108BD9-81ED-4DB2-BD59-A6C34878D82A}">
-                    <a16:rowId xmlns:a16="http://schemas.microsoft.com/office/drawing/2014/main" val="10004"/>
-                  </a:ext>
-                </a:extLst>
               </a:tr>
               <a:tr h="457200">
                 <a:tc>
@@ -9476,7 +8540,6 @@
                         <a:defRPr sz="900" b="0"/>
                       </a:pPr>
                       <a:r>
-                        <a:rPr sz="1800"/>
                         <a:t>Energy price</a:t>
                       </a:r>
                     </a:p>
@@ -9496,7 +8559,6 @@
                         <a:defRPr sz="900" b="0"/>
                       </a:pPr>
                       <a:r>
-                        <a:rPr sz="1800"/>
                         <a:t>0.18</a:t>
                       </a:r>
                     </a:p>
@@ -9516,7 +8578,6 @@
                         <a:defRPr sz="900" b="0"/>
                       </a:pPr>
                       <a:r>
-                        <a:rPr sz="1800"/>
                         <a:t>EUR/kWh</a:t>
                       </a:r>
                     </a:p>
@@ -9536,7 +8597,6 @@
                         <a:defRPr sz="900" b="0"/>
                       </a:pPr>
                       <a:r>
-                        <a:rPr sz="1800"/>
                         <a:t>Eurostat</a:t>
                       </a:r>
                     </a:p>
@@ -9556,7 +8616,6 @@
                         <a:defRPr sz="900" b="0"/>
                       </a:pPr>
                       <a:r>
-                        <a:rPr sz="1800"/>
                         <a:t>Baltic industrial</a:t>
                       </a:r>
                     </a:p>
@@ -9576,7 +8635,6 @@
                         <a:defRPr sz="900" b="0"/>
                       </a:pPr>
                       <a:r>
-                        <a:rPr sz="1800"/>
                         <a:t>Base</a:t>
                       </a:r>
                     </a:p>
@@ -9587,11 +8645,6 @@
                     </a:solidFill>
                   </a:tcPr>
                 </a:tc>
-                <a:extLst>
-                  <a:ext uri="{0D108BD9-81ED-4DB2-BD59-A6C34878D82A}">
-                    <a16:rowId xmlns:a16="http://schemas.microsoft.com/office/drawing/2014/main" val="10005"/>
-                  </a:ext>
-                </a:extLst>
               </a:tr>
               <a:tr h="457200">
                 <a:tc>
@@ -9603,7 +8656,6 @@
                         <a:defRPr sz="900" b="0"/>
                       </a:pPr>
                       <a:r>
-                        <a:rPr sz="1800"/>
                         <a:t>Scrap / yield</a:t>
                       </a:r>
                     </a:p>
@@ -9623,7 +8675,6 @@
                         <a:defRPr sz="900" b="0"/>
                       </a:pPr>
                       <a:r>
-                        <a:rPr sz="1800"/>
                         <a:t>2% - 5%</a:t>
                       </a:r>
                     </a:p>
@@ -9643,7 +8694,6 @@
                         <a:defRPr sz="900" b="0"/>
                       </a:pPr>
                       <a:r>
-                        <a:rPr sz="1800"/>
                         <a:t>%</a:t>
                       </a:r>
                     </a:p>
@@ -9663,7 +8713,6 @@
                         <a:defRPr sz="900" b="0"/>
                       </a:pPr>
                       <a:r>
-                        <a:rPr sz="1800"/>
                         <a:t>Industry Std</a:t>
                       </a:r>
                     </a:p>
@@ -9683,7 +8732,6 @@
                         <a:defRPr sz="900" b="0"/>
                       </a:pPr>
                       <a:r>
-                        <a:rPr sz="1800"/>
                         <a:t>Improving ramp-up</a:t>
                       </a:r>
                     </a:p>
@@ -9703,7 +8751,6 @@
                         <a:defRPr sz="900" b="0"/>
                       </a:pPr>
                       <a:r>
-                        <a:rPr sz="1800"/>
                         <a:t>Base</a:t>
                       </a:r>
                     </a:p>
@@ -9714,11 +8761,6 @@
                     </a:solidFill>
                   </a:tcPr>
                 </a:tc>
-                <a:extLst>
-                  <a:ext uri="{0D108BD9-81ED-4DB2-BD59-A6C34878D82A}">
-                    <a16:rowId xmlns:a16="http://schemas.microsoft.com/office/drawing/2014/main" val="10006"/>
-                  </a:ext>
-                </a:extLst>
               </a:tr>
               <a:tr h="457200">
                 <a:tc>
@@ -9730,7 +8772,6 @@
                         <a:defRPr sz="900" b="0"/>
                       </a:pPr>
                       <a:r>
-                        <a:rPr sz="1800"/>
                         <a:t>Maintenance</a:t>
                       </a:r>
                     </a:p>
@@ -9750,7 +8791,6 @@
                         <a:defRPr sz="900" b="0"/>
                       </a:pPr>
                       <a:r>
-                        <a:rPr sz="1800"/>
                         <a:t>432,000</a:t>
                       </a:r>
                     </a:p>
@@ -9770,7 +8810,6 @@
                         <a:defRPr sz="900" b="0"/>
                       </a:pPr>
                       <a:r>
-                        <a:rPr sz="1800"/>
                         <a:t>EUR/yr</a:t>
                       </a:r>
                     </a:p>
@@ -9790,7 +8829,6 @@
                         <a:defRPr sz="900" b="0"/>
                       </a:pPr>
                       <a:r>
-                        <a:rPr sz="1800"/>
                         <a:t>Vendor spec</a:t>
                       </a:r>
                     </a:p>
@@ -9810,7 +8848,6 @@
                         <a:defRPr sz="900" b="0"/>
                       </a:pPr>
                       <a:r>
-                        <a:rPr sz="1800"/>
                         <a:t>Scaled for 250MW</a:t>
                       </a:r>
                     </a:p>
@@ -9830,7 +8867,6 @@
                         <a:defRPr sz="900" b="0"/>
                       </a:pPr>
                       <a:r>
-                        <a:rPr sz="1800" dirty="0"/>
                         <a:t>Base</a:t>
                       </a:r>
                     </a:p>
@@ -9841,11 +8877,6 @@
                     </a:solidFill>
                   </a:tcPr>
                 </a:tc>
-                <a:extLst>
-                  <a:ext uri="{0D108BD9-81ED-4DB2-BD59-A6C34878D82A}">
-                    <a16:rowId xmlns:a16="http://schemas.microsoft.com/office/drawing/2014/main" val="10007"/>
-                  </a:ext>
-                </a:extLst>
               </a:tr>
             </a:tbl>
           </a:graphicData>
